--- a/Freeze_발표자료.pptx
+++ b/Freeze_발표자료.pptx
@@ -3148,7 +3148,7 @@
         <p:spPr>
           <a:xfrm>
             <a:off x="0" y="0"/>
-            <a:ext cx="73152" cy="6858000"/>
+            <a:ext cx="91440" cy="6858000"/>
           </a:xfrm>
           <a:prstGeom prst="rect">
             <a:avLst/>
@@ -3190,7 +3190,7 @@
         </p:nvSpPr>
         <p:spPr>
           <a:xfrm>
-            <a:off x="365760" y="1097280"/>
+            <a:off x="457200" y="1005840"/>
             <a:ext cx="2926080" cy="347472"/>
           </a:xfrm>
           <a:prstGeom prst="rect">
@@ -3235,8 +3235,8 @@
         </p:nvSpPr>
         <p:spPr>
           <a:xfrm>
-            <a:off x="365760" y="1078992"/>
-            <a:ext cx="3108960" cy="384048"/>
+            <a:off x="548640" y="1051560"/>
+            <a:ext cx="2743200" cy="292608"/>
           </a:xfrm>
           <a:prstGeom prst="rect">
             <a:avLst/>
@@ -3251,13 +3251,13 @@
           <a:p>
             <a:pPr algn="l"/>
             <a:r>
-              <a:rPr sz="1100" b="0">
+              <a:rPr sz="1000" b="1" i="0">
                 <a:solidFill>
                   <a:srgbClr val="22C55E"/>
                 </a:solidFill>
-                <a:latin typeface="맑은 고딕"/>
-              </a:rPr>
-              <a:t>🎓  캡스톤 디자인 프로젝트</a:t>
+                <a:latin typeface="NanumBarunGothic"/>
+              </a:rPr>
+              <a:t>🎓 캡스톤 디자인 프로젝트</a:t>
             </a:r>
           </a:p>
         </p:txBody>
@@ -3270,8 +3270,8 @@
         </p:nvSpPr>
         <p:spPr>
           <a:xfrm>
-            <a:off x="365760" y="1572768"/>
-            <a:ext cx="6400800" cy="1005840"/>
+            <a:off x="457200" y="1481328"/>
+            <a:ext cx="6858000" cy="1188720"/>
           </a:xfrm>
           <a:prstGeom prst="rect">
             <a:avLst/>
@@ -3286,13 +3286,13 @@
           <a:p>
             <a:pPr algn="l"/>
             <a:r>
-              <a:rPr sz="5600" b="1">
+              <a:rPr sz="6000" b="1" i="0">
                 <a:solidFill>
                   <a:srgbClr val="FFFFFF"/>
                 </a:solidFill>
-                <a:latin typeface="맑은 고딕"/>
-              </a:rPr>
-              <a:t>❄️  Freeze</a:t>
+                <a:latin typeface="NanumBarunGothic"/>
+              </a:rPr>
+              <a:t>❄️ Freeze</a:t>
             </a:r>
           </a:p>
         </p:txBody>
@@ -3305,8 +3305,8 @@
         </p:nvSpPr>
         <p:spPr>
           <a:xfrm>
-            <a:off x="365760" y="2578608"/>
-            <a:ext cx="6400800" cy="502920"/>
+            <a:off x="457200" y="2697480"/>
+            <a:ext cx="7315200" cy="502920"/>
           </a:xfrm>
           <a:prstGeom prst="rect">
             <a:avLst/>
@@ -3321,11 +3321,11 @@
           <a:p>
             <a:pPr algn="l"/>
             <a:r>
-              <a:rPr sz="2000" b="0">
+              <a:rPr sz="1900" b="0" i="0">
                 <a:solidFill>
                   <a:srgbClr val="94A3B8"/>
                 </a:solidFill>
-                <a:latin typeface="맑은 고딕"/>
+                <a:latin typeface="NanumBarunGothic"/>
               </a:rPr>
               <a:t>스마트 냉장고 식재료 관리 및 레시피 추천 시스템</a:t>
             </a:r>
@@ -3340,8 +3340,8 @@
         </p:nvSpPr>
         <p:spPr>
           <a:xfrm>
-            <a:off x="365760" y="3127248"/>
-            <a:ext cx="6400800" cy="365760"/>
+            <a:off x="457200" y="3291840"/>
+            <a:ext cx="7315200" cy="365760"/>
           </a:xfrm>
           <a:prstGeom prst="rect">
             <a:avLst/>
@@ -3356,13 +3356,13 @@
           <a:p>
             <a:pPr algn="l"/>
             <a:r>
-              <a:rPr sz="1300" b="0">
+              <a:rPr sz="1300" b="0" i="0">
                 <a:solidFill>
                   <a:srgbClr val="475569"/>
                 </a:solidFill>
-                <a:latin typeface="맑은 고딕"/>
-              </a:rPr>
-              <a:t>온디바이스 TinyML(TFLite) 기반  ·  인터넷 불필요  ·  실기기 구동 완료</a:t>
+                <a:latin typeface="NanumBarunGothic"/>
+              </a:rPr>
+              <a:t>온디바이스 TinyML · 인터넷 불필요 · 실기기 구동 완료</a:t>
             </a:r>
           </a:p>
         </p:txBody>
@@ -3375,8 +3375,8 @@
         </p:nvSpPr>
         <p:spPr>
           <a:xfrm>
-            <a:off x="365760" y="3657600"/>
-            <a:ext cx="2011680" cy="1005840"/>
+            <a:off x="457200" y="3840480"/>
+            <a:ext cx="2194560" cy="1051560"/>
           </a:xfrm>
           <a:prstGeom prst="rect">
             <a:avLst/>
@@ -3420,8 +3420,8 @@
         </p:nvSpPr>
         <p:spPr>
           <a:xfrm>
-            <a:off x="502920" y="3749039"/>
-            <a:ext cx="1828800" cy="292608"/>
+            <a:off x="640080" y="3977639"/>
+            <a:ext cx="1920240" cy="320040"/>
           </a:xfrm>
           <a:prstGeom prst="rect">
             <a:avLst/>
@@ -3436,11 +3436,11 @@
           <a:p>
             <a:pPr algn="l"/>
             <a:r>
-              <a:rPr sz="1100" b="0">
+              <a:rPr sz="1100" b="0" i="0">
                 <a:solidFill>
                   <a:srgbClr val="22C55E"/>
                 </a:solidFill>
-                <a:latin typeface="맑은 고딕"/>
+                <a:latin typeface="NanumBarunGothic"/>
               </a:rPr>
               <a:t>👑 팀장</a:t>
             </a:r>
@@ -3455,8 +3455,8 @@
         </p:nvSpPr>
         <p:spPr>
           <a:xfrm>
-            <a:off x="502920" y="4041648"/>
-            <a:ext cx="1828800" cy="411480"/>
+            <a:off x="640080" y="4315968"/>
+            <a:ext cx="1920240" cy="411480"/>
           </a:xfrm>
           <a:prstGeom prst="rect">
             <a:avLst/>
@@ -3471,11 +3471,11 @@
           <a:p>
             <a:pPr algn="l"/>
             <a:r>
-              <a:rPr sz="1800" b="1">
+              <a:rPr sz="2000" b="1" i="0">
                 <a:solidFill>
                   <a:srgbClr val="FFFFFF"/>
                 </a:solidFill>
-                <a:latin typeface="맑은 고딕"/>
+                <a:latin typeface="NanumBarunGothic"/>
               </a:rPr>
               <a:t>유영서</a:t>
             </a:r>
@@ -3490,8 +3490,8 @@
         </p:nvSpPr>
         <p:spPr>
           <a:xfrm>
-            <a:off x="2560320" y="3657600"/>
-            <a:ext cx="2011680" cy="1005840"/>
+            <a:off x="2834640" y="3840480"/>
+            <a:ext cx="2194560" cy="1051560"/>
           </a:xfrm>
           <a:prstGeom prst="rect">
             <a:avLst/>
@@ -3535,8 +3535,8 @@
         </p:nvSpPr>
         <p:spPr>
           <a:xfrm>
-            <a:off x="2697480" y="3749039"/>
-            <a:ext cx="1828800" cy="292608"/>
+            <a:off x="3017520" y="3977639"/>
+            <a:ext cx="1920240" cy="320040"/>
           </a:xfrm>
           <a:prstGeom prst="rect">
             <a:avLst/>
@@ -3551,11 +3551,11 @@
           <a:p>
             <a:pPr algn="l"/>
             <a:r>
-              <a:rPr sz="1100" b="0">
+              <a:rPr sz="1100" b="0" i="0">
                 <a:solidFill>
                   <a:srgbClr val="22C55E"/>
                 </a:solidFill>
-                <a:latin typeface="맑은 고딕"/>
+                <a:latin typeface="NanumBarunGothic"/>
               </a:rPr>
               <a:t>💻 팀원</a:t>
             </a:r>
@@ -3570,8 +3570,8 @@
         </p:nvSpPr>
         <p:spPr>
           <a:xfrm>
-            <a:off x="2697480" y="4041648"/>
-            <a:ext cx="1828800" cy="411480"/>
+            <a:off x="3017520" y="4315968"/>
+            <a:ext cx="1920240" cy="411480"/>
           </a:xfrm>
           <a:prstGeom prst="rect">
             <a:avLst/>
@@ -3586,11 +3586,11 @@
           <a:p>
             <a:pPr algn="l"/>
             <a:r>
-              <a:rPr sz="1800" b="1">
+              <a:rPr sz="2000" b="1" i="0">
                 <a:solidFill>
                   <a:srgbClr val="FFFFFF"/>
                 </a:solidFill>
-                <a:latin typeface="맑은 고딕"/>
+                <a:latin typeface="NanumBarunGothic"/>
               </a:rPr>
               <a:t>김문성</a:t>
             </a:r>
@@ -3613,8 +3613,8 @@
         </p:blipFill>
         <p:spPr>
           <a:xfrm>
-            <a:off x="8046720" y="731520"/>
-            <a:ext cx="2011680" cy="3566160"/>
+            <a:off x="8046720" y="548640"/>
+            <a:ext cx="1920240" cy="3419856"/>
           </a:xfrm>
           <a:prstGeom prst="rect">
             <a:avLst/>
@@ -3637,8 +3637,8 @@
         </p:blipFill>
         <p:spPr>
           <a:xfrm>
-            <a:off x="9875520" y="1097280"/>
-            <a:ext cx="1828800" cy="3255264"/>
+            <a:off x="9784080" y="822960"/>
+            <a:ext cx="2103120" cy="3739896"/>
           </a:xfrm>
           <a:prstGeom prst="rect">
             <a:avLst/>
@@ -3653,27 +3653,27 @@
         </p:nvSpPr>
         <p:spPr>
           <a:xfrm>
-            <a:off x="11430000" y="6492240"/>
-            <a:ext cx="731520" cy="274320"/>
-          </a:xfrm>
-          <a:prstGeom prst="rect">
-            <a:avLst/>
-          </a:prstGeom>
-          <a:noFill/>
-        </p:spPr>
-        <p:txBody>
-          <a:bodyPr wrap="square">
-            <a:spAutoFit/>
-          </a:bodyPr>
-          <a:lstStyle/>
-          <a:p>
-            <a:pPr algn="l"/>
-            <a:r>
-              <a:rPr sz="1100" b="0">
+            <a:off x="11247120" y="6492240"/>
+            <a:ext cx="914400" cy="274320"/>
+          </a:xfrm>
+          <a:prstGeom prst="rect">
+            <a:avLst/>
+          </a:prstGeom>
+          <a:noFill/>
+        </p:spPr>
+        <p:txBody>
+          <a:bodyPr wrap="square">
+            <a:spAutoFit/>
+          </a:bodyPr>
+          <a:lstStyle/>
+          <a:p>
+            <a:pPr algn="r"/>
+            <a:r>
+              <a:rPr sz="1100" b="0" i="0">
                 <a:solidFill>
                   <a:srgbClr val="334155"/>
                 </a:solidFill>
-                <a:latin typeface="맑은 고딕"/>
+                <a:latin typeface="NanumBarunGothic"/>
               </a:rPr>
               <a:t>01 / 09</a:t>
             </a:r>
@@ -3750,7 +3750,7 @@
         <p:spPr>
           <a:xfrm>
             <a:off x="0" y="0"/>
-            <a:ext cx="73152" cy="6858000"/>
+            <a:ext cx="91440" cy="6858000"/>
           </a:xfrm>
           <a:prstGeom prst="rect">
             <a:avLst/>
@@ -3792,8 +3792,8 @@
         </p:nvSpPr>
         <p:spPr>
           <a:xfrm>
-            <a:off x="365760" y="457200"/>
-            <a:ext cx="2743200" cy="320040"/>
+            <a:off x="457200" y="411480"/>
+            <a:ext cx="3657600" cy="320040"/>
           </a:xfrm>
           <a:prstGeom prst="rect">
             <a:avLst/>
@@ -3808,13 +3808,13 @@
           <a:p>
             <a:pPr algn="l"/>
             <a:r>
-              <a:rPr sz="1100" b="1">
+              <a:rPr sz="1000" b="1" i="0">
                 <a:solidFill>
                   <a:srgbClr val="22C55E"/>
                 </a:solidFill>
-                <a:latin typeface="맑은 고딕"/>
-              </a:rPr>
-              <a:t>목표</a:t>
+                <a:latin typeface="NanumBarunGothic"/>
+              </a:rPr>
+              <a:t>목 표</a:t>
             </a:r>
           </a:p>
         </p:txBody>
@@ -3827,8 +3827,8 @@
         </p:nvSpPr>
         <p:spPr>
           <a:xfrm>
-            <a:off x="365760" y="822960"/>
-            <a:ext cx="7315200" cy="731520"/>
+            <a:off x="457200" y="731520"/>
+            <a:ext cx="7772400" cy="822960"/>
           </a:xfrm>
           <a:prstGeom prst="rect">
             <a:avLst/>
@@ -3843,11 +3843,11 @@
           <a:p>
             <a:pPr algn="l"/>
             <a:r>
-              <a:rPr sz="4000" b="1">
+              <a:rPr sz="3800" b="1" i="0">
                 <a:solidFill>
                   <a:srgbClr val="FFFFFF"/>
                 </a:solidFill>
-                <a:latin typeface="맑은 고딕"/>
+                <a:latin typeface="NanumBarunGothic"/>
               </a:rPr>
               <a:t>최종 목표</a:t>
             </a:r>
@@ -3862,8 +3862,8 @@
         </p:nvSpPr>
         <p:spPr>
           <a:xfrm>
-            <a:off x="365760" y="1920240"/>
-            <a:ext cx="3657600" cy="4114800"/>
+            <a:off x="457200" y="1783080"/>
+            <a:ext cx="3657600" cy="4572000"/>
           </a:xfrm>
           <a:prstGeom prst="rect">
             <a:avLst/>
@@ -3907,7 +3907,7 @@
         </p:nvSpPr>
         <p:spPr>
           <a:xfrm>
-            <a:off x="594360" y="2103120"/>
+            <a:off x="685800" y="1965960"/>
             <a:ext cx="731520" cy="548640"/>
           </a:xfrm>
           <a:prstGeom prst="rect">
@@ -3923,11 +3923,11 @@
           <a:p>
             <a:pPr algn="l"/>
             <a:r>
-              <a:rPr sz="3000" b="0">
+              <a:rPr sz="3200" b="0" i="0">
                 <a:solidFill>
                   <a:srgbClr val="FFFFFF"/>
                 </a:solidFill>
-                <a:latin typeface="맑은 고딕"/>
+                <a:latin typeface="NanumBarunGothic"/>
               </a:rPr>
               <a:t>🤖</a:t>
             </a:r>
@@ -3942,7 +3942,7 @@
         </p:nvSpPr>
         <p:spPr>
           <a:xfrm>
-            <a:off x="594360" y="2743200"/>
+            <a:off x="685800" y="2651760"/>
             <a:ext cx="3291840" cy="457200"/>
           </a:xfrm>
           <a:prstGeom prst="rect">
@@ -3958,11 +3958,11 @@
           <a:p>
             <a:pPr algn="l"/>
             <a:r>
-              <a:rPr sz="1700" b="1">
+              <a:rPr sz="1700" b="1" i="0">
                 <a:solidFill>
                   <a:srgbClr val="FFFFFF"/>
                 </a:solidFill>
-                <a:latin typeface="맑은 고딕"/>
+                <a:latin typeface="NanumBarunGothic"/>
               </a:rPr>
               <a:t>온디바이스 TinyML</a:t>
             </a:r>
@@ -3977,8 +3977,8 @@
         </p:nvSpPr>
         <p:spPr>
           <a:xfrm>
-            <a:off x="594360" y="3246120"/>
-            <a:ext cx="3291840" cy="914400"/>
+            <a:off x="685800" y="3200400"/>
+            <a:ext cx="3291840" cy="1463040"/>
           </a:xfrm>
           <a:prstGeom prst="rect">
             <a:avLst/>
@@ -3993,14 +3993,15 @@
           <a:p>
             <a:pPr algn="l"/>
             <a:r>
-              <a:rPr sz="1300" b="0">
+              <a:rPr sz="1300" b="0" i="0">
                 <a:solidFill>
                   <a:srgbClr val="94A3B8"/>
                 </a:solidFill>
-                <a:latin typeface="맑은 고딕"/>
+                <a:latin typeface="NanumBarunGothic"/>
               </a:rPr>
               <a:t>인터넷 연결 없이 기기 자체에서
-AI 추론 · 교수 요구사항 완전 충족</a:t>
+AI 추론 수행
+교수 요구사항 완전 충족</a:t>
             </a:r>
           </a:p>
         </p:txBody>
@@ -4013,8 +4014,8 @@
         </p:nvSpPr>
         <p:spPr>
           <a:xfrm>
-            <a:off x="4297680" y="1920240"/>
-            <a:ext cx="3657600" cy="4114800"/>
+            <a:off x="4370832" y="1783080"/>
+            <a:ext cx="3657600" cy="4572000"/>
           </a:xfrm>
           <a:prstGeom prst="rect">
             <a:avLst/>
@@ -4058,7 +4059,7 @@
         </p:nvSpPr>
         <p:spPr>
           <a:xfrm>
-            <a:off x="4526280" y="2103120"/>
+            <a:off x="4599432" y="1965960"/>
             <a:ext cx="731520" cy="548640"/>
           </a:xfrm>
           <a:prstGeom prst="rect">
@@ -4074,11 +4075,11 @@
           <a:p>
             <a:pPr algn="l"/>
             <a:r>
-              <a:rPr sz="3000" b="0">
+              <a:rPr sz="3200" b="0" i="0">
                 <a:solidFill>
                   <a:srgbClr val="FFFFFF"/>
                 </a:solidFill>
-                <a:latin typeface="맑은 고딕"/>
+                <a:latin typeface="NanumBarunGothic"/>
               </a:rPr>
               <a:t>📸</a:t>
             </a:r>
@@ -4093,7 +4094,7 @@
         </p:nvSpPr>
         <p:spPr>
           <a:xfrm>
-            <a:off x="4526280" y="2743200"/>
+            <a:off x="4599432" y="2651760"/>
             <a:ext cx="3291840" cy="457200"/>
           </a:xfrm>
           <a:prstGeom prst="rect">
@@ -4109,11 +4110,11 @@
           <a:p>
             <a:pPr algn="l"/>
             <a:r>
-              <a:rPr sz="1700" b="1">
+              <a:rPr sz="1700" b="1" i="0">
                 <a:solidFill>
                   <a:srgbClr val="FFFFFF"/>
                 </a:solidFill>
-                <a:latin typeface="맑은 고딕"/>
+                <a:latin typeface="NanumBarunGothic"/>
               </a:rPr>
               <a:t>실시간 식재료 인식</a:t>
             </a:r>
@@ -4128,8 +4129,8 @@
         </p:nvSpPr>
         <p:spPr>
           <a:xfrm>
-            <a:off x="4526280" y="3246120"/>
-            <a:ext cx="3291840" cy="914400"/>
+            <a:off x="4599432" y="3200400"/>
+            <a:ext cx="3291840" cy="1463040"/>
           </a:xfrm>
           <a:prstGeom prst="rect">
             <a:avLst/>
@@ -4144,14 +4145,15 @@
           <a:p>
             <a:pPr algn="l"/>
             <a:r>
-              <a:rPr sz="1300" b="0">
+              <a:rPr sz="1300" b="0" i="0">
                 <a:solidFill>
                   <a:srgbClr val="94A3B8"/>
                 </a:solidFill>
-                <a:latin typeface="맑은 고딕"/>
-              </a:rPr>
-              <a:t>MobileNetV2 기반 36종 식재료
-카메라 촬영으로 자동 분류</a:t>
+                <a:latin typeface="NanumBarunGothic"/>
+              </a:rPr>
+              <a:t>MobileNetV2 기반 36종
+식재료 카메라 촬영으로
+자동 분류 및 수량 추정</a:t>
             </a:r>
           </a:p>
         </p:txBody>
@@ -4164,8 +4166,8 @@
         </p:nvSpPr>
         <p:spPr>
           <a:xfrm>
-            <a:off x="8229600" y="1920240"/>
-            <a:ext cx="3657600" cy="4114800"/>
+            <a:off x="8284464" y="1783080"/>
+            <a:ext cx="3657600" cy="4572000"/>
           </a:xfrm>
           <a:prstGeom prst="rect">
             <a:avLst/>
@@ -4209,7 +4211,7 @@
         </p:nvSpPr>
         <p:spPr>
           <a:xfrm>
-            <a:off x="8458200" y="2103120"/>
+            <a:off x="8513064" y="1965960"/>
             <a:ext cx="731520" cy="548640"/>
           </a:xfrm>
           <a:prstGeom prst="rect">
@@ -4225,11 +4227,11 @@
           <a:p>
             <a:pPr algn="l"/>
             <a:r>
-              <a:rPr sz="3000" b="0">
+              <a:rPr sz="3200" b="0" i="0">
                 <a:solidFill>
                   <a:srgbClr val="FFFFFF"/>
                 </a:solidFill>
-                <a:latin typeface="맑은 고딕"/>
+                <a:latin typeface="NanumBarunGothic"/>
               </a:rPr>
               <a:t>🍳</a:t>
             </a:r>
@@ -4244,7 +4246,7 @@
         </p:nvSpPr>
         <p:spPr>
           <a:xfrm>
-            <a:off x="8458200" y="2743200"/>
+            <a:off x="8513064" y="2651760"/>
             <a:ext cx="3291840" cy="457200"/>
           </a:xfrm>
           <a:prstGeom prst="rect">
@@ -4260,11 +4262,11 @@
           <a:p>
             <a:pPr algn="l"/>
             <a:r>
-              <a:rPr sz="1700" b="1">
+              <a:rPr sz="1700" b="1" i="0">
                 <a:solidFill>
                   <a:srgbClr val="FFFFFF"/>
                 </a:solidFill>
-                <a:latin typeface="맑은 고딕"/>
+                <a:latin typeface="NanumBarunGothic"/>
               </a:rPr>
               <a:t>스마트 냉장고 관리</a:t>
             </a:r>
@@ -4279,8 +4281,8 @@
         </p:nvSpPr>
         <p:spPr>
           <a:xfrm>
-            <a:off x="8458200" y="3246120"/>
-            <a:ext cx="3291840" cy="914400"/>
+            <a:off x="8513064" y="3200400"/>
+            <a:ext cx="3291840" cy="1463040"/>
           </a:xfrm>
           <a:prstGeom prst="rect">
             <a:avLst/>
@@ -4295,14 +4297,15 @@
           <a:p>
             <a:pPr algn="l"/>
             <a:r>
-              <a:rPr sz="1300" b="0">
+              <a:rPr sz="1300" b="0" i="0">
                 <a:solidFill>
                   <a:srgbClr val="94A3B8"/>
                 </a:solidFill>
-                <a:latin typeface="맑은 고딕"/>
+                <a:latin typeface="NanumBarunGothic"/>
               </a:rPr>
               <a:t>냉장고 재고 자동 등록
-유통기한 관리 · 레시피 추천</a:t>
+유통기한 D-Day 관리
+보유 재료 기반 레시피 추천</a:t>
             </a:r>
           </a:p>
         </p:txBody>
@@ -4315,27 +4318,27 @@
         </p:nvSpPr>
         <p:spPr>
           <a:xfrm>
-            <a:off x="11430000" y="6492240"/>
-            <a:ext cx="731520" cy="274320"/>
-          </a:xfrm>
-          <a:prstGeom prst="rect">
-            <a:avLst/>
-          </a:prstGeom>
-          <a:noFill/>
-        </p:spPr>
-        <p:txBody>
-          <a:bodyPr wrap="square">
-            <a:spAutoFit/>
-          </a:bodyPr>
-          <a:lstStyle/>
-          <a:p>
-            <a:pPr algn="l"/>
-            <a:r>
-              <a:rPr sz="1100" b="0">
+            <a:off x="11247120" y="6492240"/>
+            <a:ext cx="914400" cy="274320"/>
+          </a:xfrm>
+          <a:prstGeom prst="rect">
+            <a:avLst/>
+          </a:prstGeom>
+          <a:noFill/>
+        </p:spPr>
+        <p:txBody>
+          <a:bodyPr wrap="square">
+            <a:spAutoFit/>
+          </a:bodyPr>
+          <a:lstStyle/>
+          <a:p>
+            <a:pPr algn="r"/>
+            <a:r>
+              <a:rPr sz="1100" b="0" i="0">
                 <a:solidFill>
                   <a:srgbClr val="334155"/>
                 </a:solidFill>
-                <a:latin typeface="맑은 고딕"/>
+                <a:latin typeface="NanumBarunGothic"/>
               </a:rPr>
               <a:t>02 / 09</a:t>
             </a:r>
@@ -4412,7 +4415,7 @@
         <p:spPr>
           <a:xfrm>
             <a:off x="0" y="0"/>
-            <a:ext cx="73152" cy="6858000"/>
+            <a:ext cx="91440" cy="6858000"/>
           </a:xfrm>
           <a:prstGeom prst="rect">
             <a:avLst/>
@@ -4454,8 +4457,8 @@
         </p:nvSpPr>
         <p:spPr>
           <a:xfrm>
-            <a:off x="365760" y="457200"/>
-            <a:ext cx="2743200" cy="320040"/>
+            <a:off x="457200" y="411480"/>
+            <a:ext cx="3657600" cy="320040"/>
           </a:xfrm>
           <a:prstGeom prst="rect">
             <a:avLst/>
@@ -4470,13 +4473,13 @@
           <a:p>
             <a:pPr algn="l"/>
             <a:r>
-              <a:rPr sz="1100" b="1">
+              <a:rPr sz="1000" b="1" i="0">
                 <a:solidFill>
                   <a:srgbClr val="22C55E"/>
                 </a:solidFill>
-                <a:latin typeface="맑은 고딕"/>
-              </a:rPr>
-              <a:t>성과물</a:t>
+                <a:latin typeface="NanumBarunGothic"/>
+              </a:rPr>
+              <a:t>성 과 물</a:t>
             </a:r>
           </a:p>
         </p:txBody>
@@ -4489,8 +4492,8 @@
         </p:nvSpPr>
         <p:spPr>
           <a:xfrm>
-            <a:off x="365760" y="822960"/>
-            <a:ext cx="7315200" cy="731520"/>
+            <a:off x="457200" y="731520"/>
+            <a:ext cx="7772400" cy="822960"/>
           </a:xfrm>
           <a:prstGeom prst="rect">
             <a:avLst/>
@@ -4505,11 +4508,11 @@
           <a:p>
             <a:pPr algn="l"/>
             <a:r>
-              <a:rPr sz="3600" b="1">
+              <a:rPr sz="3800" b="1" i="0">
                 <a:solidFill>
                   <a:srgbClr val="FFFFFF"/>
                 </a:solidFill>
-                <a:latin typeface="맑은 고딕"/>
+                <a:latin typeface="NanumBarunGothic"/>
               </a:rPr>
               <a:t>최종 성과물 및 기여 사항</a:t>
             </a:r>
@@ -4524,8 +4527,8 @@
         </p:nvSpPr>
         <p:spPr>
           <a:xfrm>
-            <a:off x="365760" y="1828800"/>
-            <a:ext cx="502920" cy="502920"/>
+            <a:off x="457200" y="1783080"/>
+            <a:ext cx="475488" cy="475488"/>
           </a:xfrm>
           <a:prstGeom prst="rect">
             <a:avLst/>
@@ -4569,8 +4572,8 @@
         </p:nvSpPr>
         <p:spPr>
           <a:xfrm>
-            <a:off x="411480" y="1874520"/>
-            <a:ext cx="457200" cy="457200"/>
+            <a:off x="502920" y="1828800"/>
+            <a:ext cx="411480" cy="411480"/>
           </a:xfrm>
           <a:prstGeom prst="rect">
             <a:avLst/>
@@ -4585,11 +4588,11 @@
           <a:p>
             <a:pPr algn="l"/>
             <a:r>
-              <a:rPr sz="2000" b="0">
+              <a:rPr sz="2200" b="0" i="0">
                 <a:solidFill>
                   <a:srgbClr val="FFFFFF"/>
                 </a:solidFill>
-                <a:latin typeface="맑은 고딕"/>
+                <a:latin typeface="NanumBarunGothic"/>
               </a:rPr>
               <a:t>📱</a:t>
             </a:r>
@@ -4604,8 +4607,8 @@
         </p:nvSpPr>
         <p:spPr>
           <a:xfrm>
-            <a:off x="1005840" y="1847088"/>
-            <a:ext cx="5943600" cy="320040"/>
+            <a:off x="1078992" y="1810512"/>
+            <a:ext cx="6217920" cy="347472"/>
           </a:xfrm>
           <a:prstGeom prst="rect">
             <a:avLst/>
@@ -4620,11 +4623,11 @@
           <a:p>
             <a:pPr algn="l"/>
             <a:r>
-              <a:rPr sz="1500" b="1">
+              <a:rPr sz="1500" b="1" i="0">
                 <a:solidFill>
                   <a:srgbClr val="FFFFFF"/>
                 </a:solidFill>
-                <a:latin typeface="맑은 고딕"/>
+                <a:latin typeface="NanumBarunGothic"/>
               </a:rPr>
               <a:t>Flutter Android 앱 완성</a:t>
             </a:r>
@@ -4639,8 +4642,8 @@
         </p:nvSpPr>
         <p:spPr>
           <a:xfrm>
-            <a:off x="1005840" y="2167128"/>
-            <a:ext cx="5943600" cy="320040"/>
+            <a:off x="1078992" y="2185416"/>
+            <a:ext cx="6217920" cy="347472"/>
           </a:xfrm>
           <a:prstGeom prst="rect">
             <a:avLst/>
@@ -4655,11 +4658,11 @@
           <a:p>
             <a:pPr algn="l"/>
             <a:r>
-              <a:rPr sz="1200" b="0">
+              <a:rPr sz="1200" b="0" i="0">
                 <a:solidFill>
                   <a:srgbClr val="94A3B8"/>
                 </a:solidFill>
-                <a:latin typeface="맑은 고딕"/>
+                <a:latin typeface="NanumBarunGothic"/>
               </a:rPr>
               <a:t>Galaxy S25 Ultra 실기기 구동 확인 완료</a:t>
             </a:r>
@@ -4674,8 +4677,8 @@
         </p:nvSpPr>
         <p:spPr>
           <a:xfrm>
-            <a:off x="365760" y="2880360"/>
-            <a:ext cx="502920" cy="502920"/>
+            <a:off x="457200" y="2926080"/>
+            <a:ext cx="475488" cy="475488"/>
           </a:xfrm>
           <a:prstGeom prst="rect">
             <a:avLst/>
@@ -4719,8 +4722,8 @@
         </p:nvSpPr>
         <p:spPr>
           <a:xfrm>
-            <a:off x="411480" y="2926080"/>
-            <a:ext cx="457200" cy="457200"/>
+            <a:off x="502920" y="2971800"/>
+            <a:ext cx="411480" cy="411480"/>
           </a:xfrm>
           <a:prstGeom prst="rect">
             <a:avLst/>
@@ -4735,11 +4738,11 @@
           <a:p>
             <a:pPr algn="l"/>
             <a:r>
-              <a:rPr sz="2000" b="0">
+              <a:rPr sz="2200" b="0" i="0">
                 <a:solidFill>
                   <a:srgbClr val="FFFFFF"/>
                 </a:solidFill>
-                <a:latin typeface="맑은 고딕"/>
+                <a:latin typeface="NanumBarunGothic"/>
               </a:rPr>
               <a:t>🧠</a:t>
             </a:r>
@@ -4754,8 +4757,8 @@
         </p:nvSpPr>
         <p:spPr>
           <a:xfrm>
-            <a:off x="1005840" y="2898648"/>
-            <a:ext cx="5943600" cy="320040"/>
+            <a:off x="1078992" y="2953512"/>
+            <a:ext cx="6217920" cy="347472"/>
           </a:xfrm>
           <a:prstGeom prst="rect">
             <a:avLst/>
@@ -4770,11 +4773,11 @@
           <a:p>
             <a:pPr algn="l"/>
             <a:r>
-              <a:rPr sz="1500" b="1">
+              <a:rPr sz="1500" b="1" i="0">
                 <a:solidFill>
                   <a:srgbClr val="FFFFFF"/>
                 </a:solidFill>
-                <a:latin typeface="맑은 고딕"/>
+                <a:latin typeface="NanumBarunGothic"/>
               </a:rPr>
               <a:t>MobileNetV2 TFLite 모델 탑재</a:t>
             </a:r>
@@ -4789,8 +4792,8 @@
         </p:nvSpPr>
         <p:spPr>
           <a:xfrm>
-            <a:off x="1005840" y="3218688"/>
-            <a:ext cx="5943600" cy="320040"/>
+            <a:off x="1078992" y="3328416"/>
+            <a:ext cx="6217920" cy="347472"/>
           </a:xfrm>
           <a:prstGeom prst="rect">
             <a:avLst/>
@@ -4805,11 +4808,11 @@
           <a:p>
             <a:pPr algn="l"/>
             <a:r>
-              <a:rPr sz="1200" b="0">
+              <a:rPr sz="1200" b="0" i="0">
                 <a:solidFill>
                   <a:srgbClr val="94A3B8"/>
                 </a:solidFill>
-                <a:latin typeface="맑은 고딕"/>
+                <a:latin typeface="NanumBarunGothic"/>
               </a:rPr>
               <a:t>2.7MB 경량 모델 · 36종 식재료 인식 · Kaggle Tesla T4 GPU로 학습</a:t>
             </a:r>
@@ -4824,8 +4827,8 @@
         </p:nvSpPr>
         <p:spPr>
           <a:xfrm>
-            <a:off x="365760" y="3931920"/>
-            <a:ext cx="502920" cy="502920"/>
+            <a:off x="457200" y="4069080"/>
+            <a:ext cx="475488" cy="475488"/>
           </a:xfrm>
           <a:prstGeom prst="rect">
             <a:avLst/>
@@ -4869,8 +4872,8 @@
         </p:nvSpPr>
         <p:spPr>
           <a:xfrm>
-            <a:off x="411480" y="3977640"/>
-            <a:ext cx="457200" cy="457200"/>
+            <a:off x="502920" y="4114800"/>
+            <a:ext cx="411480" cy="411480"/>
           </a:xfrm>
           <a:prstGeom prst="rect">
             <a:avLst/>
@@ -4885,11 +4888,11 @@
           <a:p>
             <a:pPr algn="l"/>
             <a:r>
-              <a:rPr sz="2000" b="0">
+              <a:rPr sz="2200" b="0" i="0">
                 <a:solidFill>
                   <a:srgbClr val="FFFFFF"/>
                 </a:solidFill>
-                <a:latin typeface="맑은 고딕"/>
+                <a:latin typeface="NanumBarunGothic"/>
               </a:rPr>
               <a:t>🔄</a:t>
             </a:r>
@@ -4904,8 +4907,8 @@
         </p:nvSpPr>
         <p:spPr>
           <a:xfrm>
-            <a:off x="1005840" y="3950208"/>
-            <a:ext cx="5943600" cy="320040"/>
+            <a:off x="1078992" y="4096512"/>
+            <a:ext cx="6217920" cy="347472"/>
           </a:xfrm>
           <a:prstGeom prst="rect">
             <a:avLst/>
@@ -4920,11 +4923,11 @@
           <a:p>
             <a:pPr algn="l"/>
             <a:r>
-              <a:rPr sz="1500" b="1">
+              <a:rPr sz="1500" b="1" i="0">
                 <a:solidFill>
                   <a:srgbClr val="FFFFFF"/>
                 </a:solidFill>
-                <a:latin typeface="맑은 고딕"/>
+                <a:latin typeface="NanumBarunGothic"/>
               </a:rPr>
               <a:t>전체 사용자 플로우 구현</a:t>
             </a:r>
@@ -4939,8 +4942,8 @@
         </p:nvSpPr>
         <p:spPr>
           <a:xfrm>
-            <a:off x="1005840" y="4270248"/>
-            <a:ext cx="5943600" cy="320040"/>
+            <a:off x="1078992" y="4471416"/>
+            <a:ext cx="6217920" cy="347472"/>
           </a:xfrm>
           <a:prstGeom prst="rect">
             <a:avLst/>
@@ -4955,13 +4958,13 @@
           <a:p>
             <a:pPr algn="l"/>
             <a:r>
-              <a:rPr sz="1200" b="0">
+              <a:rPr sz="1200" b="0" i="0">
                 <a:solidFill>
                   <a:srgbClr val="94A3B8"/>
                 </a:solidFill>
-                <a:latin typeface="맑은 고딕"/>
-              </a:rPr>
-              <a:t>촬영 → AI분류 → 냉장고등록 → 레시피추천 End-to-End</a:t>
+                <a:latin typeface="NanumBarunGothic"/>
+              </a:rPr>
+              <a:t>촬영 → AI분류 → 냉장고등록 → 레시피추천 End-to-End 완성</a:t>
             </a:r>
           </a:p>
         </p:txBody>
@@ -4974,8 +4977,8 @@
         </p:nvSpPr>
         <p:spPr>
           <a:xfrm>
-            <a:off x="365760" y="4983479"/>
-            <a:ext cx="502920" cy="502920"/>
+            <a:off x="457200" y="5212080"/>
+            <a:ext cx="475488" cy="475488"/>
           </a:xfrm>
           <a:prstGeom prst="rect">
             <a:avLst/>
@@ -5019,8 +5022,8 @@
         </p:nvSpPr>
         <p:spPr>
           <a:xfrm>
-            <a:off x="411480" y="5029199"/>
-            <a:ext cx="457200" cy="457200"/>
+            <a:off x="502920" y="5257800"/>
+            <a:ext cx="411480" cy="411480"/>
           </a:xfrm>
           <a:prstGeom prst="rect">
             <a:avLst/>
@@ -5035,11 +5038,11 @@
           <a:p>
             <a:pPr algn="l"/>
             <a:r>
-              <a:rPr sz="2000" b="0">
+              <a:rPr sz="2200" b="0" i="0">
                 <a:solidFill>
                   <a:srgbClr val="FFFFFF"/>
                 </a:solidFill>
-                <a:latin typeface="맑은 고딕"/>
+                <a:latin typeface="NanumBarunGothic"/>
               </a:rPr>
               <a:t>🍽️</a:t>
             </a:r>
@@ -5054,8 +5057,8 @@
         </p:nvSpPr>
         <p:spPr>
           <a:xfrm>
-            <a:off x="1005840" y="5001767"/>
-            <a:ext cx="5943600" cy="320040"/>
+            <a:off x="1078992" y="5239512"/>
+            <a:ext cx="6217920" cy="347472"/>
           </a:xfrm>
           <a:prstGeom prst="rect">
             <a:avLst/>
@@ -5070,11 +5073,11 @@
           <a:p>
             <a:pPr algn="l"/>
             <a:r>
-              <a:rPr sz="1500" b="1">
+              <a:rPr sz="1500" b="1" i="0">
                 <a:solidFill>
                   <a:srgbClr val="FFFFFF"/>
                 </a:solidFill>
-                <a:latin typeface="맑은 고딕"/>
+                <a:latin typeface="NanumBarunGothic"/>
               </a:rPr>
               <a:t>레시피 API 연동</a:t>
             </a:r>
@@ -5089,8 +5092,8 @@
         </p:nvSpPr>
         <p:spPr>
           <a:xfrm>
-            <a:off x="1005840" y="5321807"/>
-            <a:ext cx="5943600" cy="320040"/>
+            <a:off x="1078992" y="5614416"/>
+            <a:ext cx="6217920" cy="347472"/>
           </a:xfrm>
           <a:prstGeom prst="rect">
             <a:avLst/>
@@ -5105,13 +5108,13 @@
           <a:p>
             <a:pPr algn="l"/>
             <a:r>
-              <a:rPr sz="1200" b="0">
+              <a:rPr sz="1200" b="0" i="0">
                 <a:solidFill>
                   <a:srgbClr val="94A3B8"/>
                 </a:solidFill>
-                <a:latin typeface="맑은 고딕"/>
-              </a:rPr>
-              <a:t>식품안전처 레시피 API + Spoonacular 이미지 AI</a:t>
+                <a:latin typeface="NanumBarunGothic"/>
+              </a:rPr>
+              <a:t>식품안전처 레시피 API + Spoonacular 이미지 AI 연동</a:t>
             </a:r>
           </a:p>
         </p:txBody>
@@ -5132,8 +5135,8 @@
         </p:blipFill>
         <p:spPr>
           <a:xfrm>
-            <a:off x="8229600" y="1371600"/>
-            <a:ext cx="2194560" cy="3904487"/>
+            <a:off x="7863840" y="1371600"/>
+            <a:ext cx="2286000" cy="4069080"/>
           </a:xfrm>
           <a:prstGeom prst="rect">
             <a:avLst/>
@@ -5148,27 +5151,27 @@
         </p:nvSpPr>
         <p:spPr>
           <a:xfrm>
-            <a:off x="11430000" y="6492240"/>
-            <a:ext cx="731520" cy="274320"/>
-          </a:xfrm>
-          <a:prstGeom prst="rect">
-            <a:avLst/>
-          </a:prstGeom>
-          <a:noFill/>
-        </p:spPr>
-        <p:txBody>
-          <a:bodyPr wrap="square">
-            <a:spAutoFit/>
-          </a:bodyPr>
-          <a:lstStyle/>
-          <a:p>
-            <a:pPr algn="l"/>
-            <a:r>
-              <a:rPr sz="1100" b="0">
+            <a:off x="11247120" y="6492240"/>
+            <a:ext cx="914400" cy="274320"/>
+          </a:xfrm>
+          <a:prstGeom prst="rect">
+            <a:avLst/>
+          </a:prstGeom>
+          <a:noFill/>
+        </p:spPr>
+        <p:txBody>
+          <a:bodyPr wrap="square">
+            <a:spAutoFit/>
+          </a:bodyPr>
+          <a:lstStyle/>
+          <a:p>
+            <a:pPr algn="r"/>
+            <a:r>
+              <a:rPr sz="1100" b="0" i="0">
                 <a:solidFill>
                   <a:srgbClr val="334155"/>
                 </a:solidFill>
-                <a:latin typeface="맑은 고딕"/>
+                <a:latin typeface="NanumBarunGothic"/>
               </a:rPr>
               <a:t>03 / 09</a:t>
             </a:r>
@@ -5245,7 +5248,7 @@
         <p:spPr>
           <a:xfrm>
             <a:off x="0" y="0"/>
-            <a:ext cx="73152" cy="6858000"/>
+            <a:ext cx="91440" cy="6858000"/>
           </a:xfrm>
           <a:prstGeom prst="rect">
             <a:avLst/>
@@ -5287,8 +5290,8 @@
         </p:nvSpPr>
         <p:spPr>
           <a:xfrm>
-            <a:off x="365760" y="457200"/>
-            <a:ext cx="2743200" cy="320040"/>
+            <a:off x="457200" y="411480"/>
+            <a:ext cx="3657600" cy="320040"/>
           </a:xfrm>
           <a:prstGeom prst="rect">
             <a:avLst/>
@@ -5303,13 +5306,13 @@
           <a:p>
             <a:pPr algn="l"/>
             <a:r>
-              <a:rPr sz="1100" b="1">
+              <a:rPr sz="1000" b="1" i="0">
                 <a:solidFill>
                   <a:srgbClr val="22C55E"/>
                 </a:solidFill>
-                <a:latin typeface="맑은 고딕"/>
-              </a:rPr>
-              <a:t>팀</a:t>
+                <a:latin typeface="NanumBarunGothic"/>
+              </a:rPr>
+              <a:t>팀  구성</a:t>
             </a:r>
           </a:p>
         </p:txBody>
@@ -5322,8 +5325,8 @@
         </p:nvSpPr>
         <p:spPr>
           <a:xfrm>
-            <a:off x="365760" y="822960"/>
-            <a:ext cx="7315200" cy="685800"/>
+            <a:off x="457200" y="731520"/>
+            <a:ext cx="7772400" cy="822960"/>
           </a:xfrm>
           <a:prstGeom prst="rect">
             <a:avLst/>
@@ -5338,11 +5341,11 @@
           <a:p>
             <a:pPr algn="l"/>
             <a:r>
-              <a:rPr sz="3600" b="1">
+              <a:rPr sz="3800" b="1" i="0">
                 <a:solidFill>
                   <a:srgbClr val="FFFFFF"/>
                 </a:solidFill>
-                <a:latin typeface="맑은 고딕"/>
+                <a:latin typeface="NanumBarunGothic"/>
               </a:rPr>
               <a:t>팀원 및 팀장 역할</a:t>
             </a:r>
@@ -5357,7 +5360,7 @@
         </p:nvSpPr>
         <p:spPr>
           <a:xfrm>
-            <a:off x="365760" y="1691640"/>
+            <a:off x="365760" y="1737360"/>
             <a:ext cx="5577840" cy="4846320"/>
           </a:xfrm>
           <a:prstGeom prst="rect">
@@ -5396,7 +5399,52 @@
       </p:sp>
       <p:sp>
         <p:nvSpPr>
-          <p:cNvPr id="7" name="TextBox 6"/>
+          <p:cNvPr id="7" name="Rectangle 6"/>
+          <p:cNvSpPr/>
+          <p:nvPr/>
+        </p:nvSpPr>
+        <p:spPr>
+          <a:xfrm>
+            <a:off x="365760" y="1737360"/>
+            <a:ext cx="5577840" cy="777240"/>
+          </a:xfrm>
+          <a:prstGeom prst="rect">
+            <a:avLst/>
+          </a:prstGeom>
+          <a:solidFill>
+            <a:srgbClr val="0A180F"/>
+          </a:solidFill>
+          <a:ln w="12700">
+            <a:solidFill>
+              <a:srgbClr val="1E3A2A"/>
+            </a:solidFill>
+          </a:ln>
+        </p:spPr>
+        <p:style>
+          <a:lnRef idx="1">
+            <a:schemeClr val="accent1"/>
+          </a:lnRef>
+          <a:fillRef idx="3">
+            <a:schemeClr val="accent1"/>
+          </a:fillRef>
+          <a:effectRef idx="2">
+            <a:schemeClr val="accent1"/>
+          </a:effectRef>
+          <a:fontRef idx="minor">
+            <a:schemeClr val="lt1"/>
+          </a:fontRef>
+        </p:style>
+        <p:txBody>
+          <a:bodyPr rtlCol="0" anchor="ctr"/>
+          <a:lstStyle/>
+          <a:p>
+            <a:pPr algn="ctr"/>
+          </a:p>
+        </p:txBody>
+      </p:sp>
+      <p:sp>
+        <p:nvSpPr>
+          <p:cNvPr id="8" name="TextBox 7"/>
           <p:cNvSpPr txBox="1"/>
           <p:nvPr/>
         </p:nvSpPr>
@@ -5418,11 +5466,11 @@
           <a:p>
             <a:pPr algn="l"/>
             <a:r>
-              <a:rPr sz="1000" b="1">
+              <a:rPr sz="1000" b="1" i="0">
                 <a:solidFill>
                   <a:srgbClr val="22C55E"/>
                 </a:solidFill>
-                <a:latin typeface="맑은 고딕"/>
+                <a:latin typeface="NanumBarunGothic"/>
               </a:rPr>
               <a:t>👑 TEAM LEADER</a:t>
             </a:r>
@@ -5431,14 +5479,14 @@
       </p:sp>
       <p:sp>
         <p:nvSpPr>
-          <p:cNvPr id="8" name="TextBox 7"/>
-          <p:cNvSpPr txBox="1"/>
-          <p:nvPr/>
-        </p:nvSpPr>
-        <p:spPr>
-          <a:xfrm>
-            <a:off x="594360" y="2121408"/>
-            <a:ext cx="2743200" cy="457200"/>
+          <p:cNvPr id="9" name="TextBox 8"/>
+          <p:cNvSpPr txBox="1"/>
+          <p:nvPr/>
+        </p:nvSpPr>
+        <p:spPr>
+          <a:xfrm>
+            <a:off x="594360" y="2148840"/>
+            <a:ext cx="2743200" cy="438912"/>
           </a:xfrm>
           <a:prstGeom prst="rect">
             <a:avLst/>
@@ -5453,11 +5501,11 @@
           <a:p>
             <a:pPr algn="l"/>
             <a:r>
-              <a:rPr sz="2200" b="1">
+              <a:rPr sz="2000" b="1" i="0">
                 <a:solidFill>
                   <a:srgbClr val="FFFFFF"/>
                 </a:solidFill>
-                <a:latin typeface="맑은 고딕"/>
+                <a:latin typeface="NanumBarunGothic"/>
               </a:rPr>
               <a:t>유영서</a:t>
             </a:r>
@@ -5466,14 +5514,14 @@
       </p:sp>
       <p:sp>
         <p:nvSpPr>
-          <p:cNvPr id="9" name="TextBox 8"/>
-          <p:cNvSpPr txBox="1"/>
-          <p:nvPr/>
-        </p:nvSpPr>
-        <p:spPr>
-          <a:xfrm>
-            <a:off x="594360" y="2697480"/>
-            <a:ext cx="5212080" cy="594360"/>
+          <p:cNvPr id="10" name="TextBox 9"/>
+          <p:cNvSpPr txBox="1"/>
+          <p:nvPr/>
+        </p:nvSpPr>
+        <p:spPr>
+          <a:xfrm>
+            <a:off x="548640" y="2651760"/>
+            <a:ext cx="5257800" cy="621792"/>
           </a:xfrm>
           <a:prstGeom prst="rect">
             <a:avLst/>
@@ -5488,11 +5536,11 @@
           <a:p>
             <a:pPr algn="l"/>
             <a:r>
-              <a:rPr sz="1300" b="0">
-                <a:solidFill>
-                  <a:srgbClr val="CBD5E1"/>
-                </a:solidFill>
-                <a:latin typeface="맑은 고딕"/>
+              <a:rPr sz="1200" b="0" i="0">
+                <a:solidFill>
+                  <a:srgbClr val="E2E8F0"/>
+                </a:solidFill>
+                <a:latin typeface="NanumBarunGothic"/>
               </a:rPr>
               <a:t>• Flutter 앱 전체 아키텍처 설계 및 Android 빌드 환경 구성</a:t>
             </a:r>
@@ -5501,14 +5549,14 @@
       </p:sp>
       <p:sp>
         <p:nvSpPr>
-          <p:cNvPr id="10" name="TextBox 9"/>
-          <p:cNvSpPr txBox="1"/>
-          <p:nvPr/>
-        </p:nvSpPr>
-        <p:spPr>
-          <a:xfrm>
-            <a:off x="594360" y="3355848"/>
-            <a:ext cx="5212080" cy="594360"/>
+          <p:cNvPr id="11" name="TextBox 10"/>
+          <p:cNvSpPr txBox="1"/>
+          <p:nvPr/>
+        </p:nvSpPr>
+        <p:spPr>
+          <a:xfrm>
+            <a:off x="548640" y="3337560"/>
+            <a:ext cx="5257800" cy="621792"/>
           </a:xfrm>
           <a:prstGeom prst="rect">
             <a:avLst/>
@@ -5523,11 +5571,11 @@
           <a:p>
             <a:pPr algn="l"/>
             <a:r>
-              <a:rPr sz="1300" b="0">
-                <a:solidFill>
-                  <a:srgbClr val="CBD5E1"/>
-                </a:solidFill>
-                <a:latin typeface="맑은 고딕"/>
+              <a:rPr sz="1200" b="0" i="0">
+                <a:solidFill>
+                  <a:srgbClr val="E2E8F0"/>
+                </a:solidFill>
+                <a:latin typeface="NanumBarunGothic"/>
               </a:rPr>
               <a:t>• TFLite AI 파이프라인 구현 (food_classifier, quantity_estimator)</a:t>
             </a:r>
@@ -5536,14 +5584,14 @@
       </p:sp>
       <p:sp>
         <p:nvSpPr>
-          <p:cNvPr id="11" name="TextBox 10"/>
-          <p:cNvSpPr txBox="1"/>
-          <p:nvPr/>
-        </p:nvSpPr>
-        <p:spPr>
-          <a:xfrm>
-            <a:off x="594360" y="4014216"/>
-            <a:ext cx="5212080" cy="594360"/>
+          <p:cNvPr id="12" name="TextBox 11"/>
+          <p:cNvSpPr txBox="1"/>
+          <p:nvPr/>
+        </p:nvSpPr>
+        <p:spPr>
+          <a:xfrm>
+            <a:off x="548640" y="4023360"/>
+            <a:ext cx="5257800" cy="621792"/>
           </a:xfrm>
           <a:prstGeom prst="rect">
             <a:avLst/>
@@ -5558,11 +5606,11 @@
           <a:p>
             <a:pPr algn="l"/>
             <a:r>
-              <a:rPr sz="1300" b="0">
-                <a:solidFill>
-                  <a:srgbClr val="CBD5E1"/>
-                </a:solidFill>
-                <a:latin typeface="맑은 고딕"/>
+              <a:rPr sz="1200" b="0" i="0">
+                <a:solidFill>
+                  <a:srgbClr val="E2E8F0"/>
+                </a:solidFill>
+                <a:latin typeface="NanumBarunGothic"/>
               </a:rPr>
               <a:t>• Kaggle GPU에서 MobileNetV2 학습 및 TFLite 변환</a:t>
             </a:r>
@@ -5571,14 +5619,14 @@
       </p:sp>
       <p:sp>
         <p:nvSpPr>
-          <p:cNvPr id="12" name="TextBox 11"/>
-          <p:cNvSpPr txBox="1"/>
-          <p:nvPr/>
-        </p:nvSpPr>
-        <p:spPr>
-          <a:xfrm>
-            <a:off x="594360" y="4672584"/>
-            <a:ext cx="5212080" cy="594360"/>
+          <p:cNvPr id="13" name="TextBox 12"/>
+          <p:cNvSpPr txBox="1"/>
+          <p:nvPr/>
+        </p:nvSpPr>
+        <p:spPr>
+          <a:xfrm>
+            <a:off x="548640" y="4709160"/>
+            <a:ext cx="5257800" cy="621792"/>
           </a:xfrm>
           <a:prstGeom prst="rect">
             <a:avLst/>
@@ -5593,27 +5641,27 @@
           <a:p>
             <a:pPr algn="l"/>
             <a:r>
-              <a:rPr sz="1300" b="0">
-                <a:solidFill>
-                  <a:srgbClr val="CBD5E1"/>
-                </a:solidFill>
-                <a:latin typeface="맑은 고딕"/>
-              </a:rPr>
-              <a:t>• 소셜 로그인 (Kakao / Google) 구현</a:t>
-            </a:r>
-          </a:p>
-        </p:txBody>
-      </p:sp>
-      <p:sp>
-        <p:nvSpPr>
-          <p:cNvPr id="13" name="TextBox 12"/>
-          <p:cNvSpPr txBox="1"/>
-          <p:nvPr/>
-        </p:nvSpPr>
-        <p:spPr>
-          <a:xfrm>
-            <a:off x="594360" y="5330952"/>
-            <a:ext cx="5212080" cy="594360"/>
+              <a:rPr sz="1200" b="0" i="0">
+                <a:solidFill>
+                  <a:srgbClr val="E2E8F0"/>
+                </a:solidFill>
+                <a:latin typeface="NanumBarunGothic"/>
+              </a:rPr>
+              <a:t>• 소셜 로그인 (Kakao/Google) · 레시피 API 연동</a:t>
+            </a:r>
+          </a:p>
+        </p:txBody>
+      </p:sp>
+      <p:sp>
+        <p:nvSpPr>
+          <p:cNvPr id="14" name="TextBox 13"/>
+          <p:cNvSpPr txBox="1"/>
+          <p:nvPr/>
+        </p:nvSpPr>
+        <p:spPr>
+          <a:xfrm>
+            <a:off x="548640" y="5394960"/>
+            <a:ext cx="5257800" cy="621792"/>
           </a:xfrm>
           <a:prstGeom prst="rect">
             <a:avLst/>
@@ -5628,26 +5676,26 @@
           <a:p>
             <a:pPr algn="l"/>
             <a:r>
-              <a:rPr sz="1300" b="0">
-                <a:solidFill>
-                  <a:srgbClr val="CBD5E1"/>
-                </a:solidFill>
-                <a:latin typeface="맑은 고딕"/>
-              </a:rPr>
-              <a:t>• 식품안전처 레시피 API · OCR + AI 병렬 처리</a:t>
-            </a:r>
-          </a:p>
-        </p:txBody>
-      </p:sp>
-      <p:sp>
-        <p:nvSpPr>
-          <p:cNvPr id="14" name="Rectangle 13"/>
+              <a:rPr sz="1200" b="0" i="0">
+                <a:solidFill>
+                  <a:srgbClr val="E2E8F0"/>
+                </a:solidFill>
+                <a:latin typeface="NanumBarunGothic"/>
+              </a:rPr>
+              <a:t>• 한국 식품 키워드 DB 구축 · OCR+AI 병렬 처리</a:t>
+            </a:r>
+          </a:p>
+        </p:txBody>
+      </p:sp>
+      <p:sp>
+        <p:nvSpPr>
+          <p:cNvPr id="15" name="Rectangle 14"/>
           <p:cNvSpPr/>
           <p:nvPr/>
         </p:nvSpPr>
         <p:spPr>
           <a:xfrm>
-            <a:off x="6217920" y="1691640"/>
+            <a:off x="6217920" y="1737360"/>
             <a:ext cx="5577840" cy="4846320"/>
           </a:xfrm>
           <a:prstGeom prst="rect">
@@ -5686,7 +5734,52 @@
       </p:sp>
       <p:sp>
         <p:nvSpPr>
-          <p:cNvPr id="15" name="TextBox 14"/>
+          <p:cNvPr id="16" name="Rectangle 15"/>
+          <p:cNvSpPr/>
+          <p:nvPr/>
+        </p:nvSpPr>
+        <p:spPr>
+          <a:xfrm>
+            <a:off x="6217920" y="1737360"/>
+            <a:ext cx="5577840" cy="777240"/>
+          </a:xfrm>
+          <a:prstGeom prst="rect">
+            <a:avLst/>
+          </a:prstGeom>
+          <a:solidFill>
+            <a:srgbClr val="0A180F"/>
+          </a:solidFill>
+          <a:ln w="12700">
+            <a:solidFill>
+              <a:srgbClr val="1E3A2A"/>
+            </a:solidFill>
+          </a:ln>
+        </p:spPr>
+        <p:style>
+          <a:lnRef idx="1">
+            <a:schemeClr val="accent1"/>
+          </a:lnRef>
+          <a:fillRef idx="3">
+            <a:schemeClr val="accent1"/>
+          </a:fillRef>
+          <a:effectRef idx="2">
+            <a:schemeClr val="accent1"/>
+          </a:effectRef>
+          <a:fontRef idx="minor">
+            <a:schemeClr val="lt1"/>
+          </a:fontRef>
+        </p:style>
+        <p:txBody>
+          <a:bodyPr rtlCol="0" anchor="ctr"/>
+          <a:lstStyle/>
+          <a:p>
+            <a:pPr algn="ctr"/>
+          </a:p>
+        </p:txBody>
+      </p:sp>
+      <p:sp>
+        <p:nvSpPr>
+          <p:cNvPr id="17" name="TextBox 16"/>
           <p:cNvSpPr txBox="1"/>
           <p:nvPr/>
         </p:nvSpPr>
@@ -5708,11 +5801,11 @@
           <a:p>
             <a:pPr algn="l"/>
             <a:r>
-              <a:rPr sz="1000" b="1">
+              <a:rPr sz="1000" b="1" i="0">
                 <a:solidFill>
                   <a:srgbClr val="60A5FA"/>
                 </a:solidFill>
-                <a:latin typeface="맑은 고딕"/>
+                <a:latin typeface="NanumBarunGothic"/>
               </a:rPr>
               <a:t>💻 TEAM MEMBER</a:t>
             </a:r>
@@ -5721,14 +5814,14 @@
       </p:sp>
       <p:sp>
         <p:nvSpPr>
-          <p:cNvPr id="16" name="TextBox 15"/>
-          <p:cNvSpPr txBox="1"/>
-          <p:nvPr/>
-        </p:nvSpPr>
-        <p:spPr>
-          <a:xfrm>
-            <a:off x="6446520" y="2121408"/>
-            <a:ext cx="2743200" cy="457200"/>
+          <p:cNvPr id="18" name="TextBox 17"/>
+          <p:cNvSpPr txBox="1"/>
+          <p:nvPr/>
+        </p:nvSpPr>
+        <p:spPr>
+          <a:xfrm>
+            <a:off x="6446520" y="2148840"/>
+            <a:ext cx="2743200" cy="438912"/>
           </a:xfrm>
           <a:prstGeom prst="rect">
             <a:avLst/>
@@ -5743,11 +5836,11 @@
           <a:p>
             <a:pPr algn="l"/>
             <a:r>
-              <a:rPr sz="2200" b="1">
+              <a:rPr sz="2000" b="1" i="0">
                 <a:solidFill>
                   <a:srgbClr val="FFFFFF"/>
                 </a:solidFill>
-                <a:latin typeface="맑은 고딕"/>
+                <a:latin typeface="NanumBarunGothic"/>
               </a:rPr>
               <a:t>김문성</a:t>
             </a:r>
@@ -5756,14 +5849,14 @@
       </p:sp>
       <p:sp>
         <p:nvSpPr>
-          <p:cNvPr id="17" name="TextBox 16"/>
-          <p:cNvSpPr txBox="1"/>
-          <p:nvPr/>
-        </p:nvSpPr>
-        <p:spPr>
-          <a:xfrm>
-            <a:off x="6446520" y="2697480"/>
-            <a:ext cx="5212080" cy="594360"/>
+          <p:cNvPr id="19" name="TextBox 18"/>
+          <p:cNvSpPr txBox="1"/>
+          <p:nvPr/>
+        </p:nvSpPr>
+        <p:spPr>
+          <a:xfrm>
+            <a:off x="6400800" y="2651760"/>
+            <a:ext cx="5257800" cy="621792"/>
           </a:xfrm>
           <a:prstGeom prst="rect">
             <a:avLst/>
@@ -5778,11 +5871,11 @@
           <a:p>
             <a:pPr algn="l"/>
             <a:r>
-              <a:rPr sz="1300" b="0">
-                <a:solidFill>
-                  <a:srgbClr val="CBD5E1"/>
-                </a:solidFill>
-                <a:latin typeface="맑은 고딕"/>
+              <a:rPr sz="1200" b="0" i="0">
+                <a:solidFill>
+                  <a:srgbClr val="E2E8F0"/>
+                </a:solidFill>
+                <a:latin typeface="NanumBarunGothic"/>
               </a:rPr>
               <a:t>• 전체 UI/UX 디자인 및 화면 구성</a:t>
             </a:r>
@@ -5791,14 +5884,14 @@
       </p:sp>
       <p:sp>
         <p:nvSpPr>
-          <p:cNvPr id="18" name="TextBox 17"/>
-          <p:cNvSpPr txBox="1"/>
-          <p:nvPr/>
-        </p:nvSpPr>
-        <p:spPr>
-          <a:xfrm>
-            <a:off x="6446520" y="3355848"/>
-            <a:ext cx="5212080" cy="594360"/>
+          <p:cNvPr id="20" name="TextBox 19"/>
+          <p:cNvSpPr txBox="1"/>
+          <p:nvPr/>
+        </p:nvSpPr>
+        <p:spPr>
+          <a:xfrm>
+            <a:off x="6400800" y="3337560"/>
+            <a:ext cx="5257800" cy="621792"/>
           </a:xfrm>
           <a:prstGeom prst="rect">
             <a:avLst/>
@@ -5813,11 +5906,11 @@
           <a:p>
             <a:pPr algn="l"/>
             <a:r>
-              <a:rPr sz="1300" b="0">
-                <a:solidFill>
-                  <a:srgbClr val="CBD5E1"/>
-                </a:solidFill>
-                <a:latin typeface="맑은 고딕"/>
+              <a:rPr sz="1200" b="0" i="0">
+                <a:solidFill>
+                  <a:srgbClr val="E2E8F0"/>
+                </a:solidFill>
+                <a:latin typeface="NanumBarunGothic"/>
               </a:rPr>
               <a:t>• 냉장고 식재료 관리 화면 개발</a:t>
             </a:r>
@@ -5826,14 +5919,14 @@
       </p:sp>
       <p:sp>
         <p:nvSpPr>
-          <p:cNvPr id="19" name="TextBox 18"/>
-          <p:cNvSpPr txBox="1"/>
-          <p:nvPr/>
-        </p:nvSpPr>
-        <p:spPr>
-          <a:xfrm>
-            <a:off x="6446520" y="4014216"/>
-            <a:ext cx="5212080" cy="594360"/>
+          <p:cNvPr id="21" name="TextBox 20"/>
+          <p:cNvSpPr txBox="1"/>
+          <p:nvPr/>
+        </p:nvSpPr>
+        <p:spPr>
+          <a:xfrm>
+            <a:off x="6400800" y="4023360"/>
+            <a:ext cx="5257800" cy="621792"/>
           </a:xfrm>
           <a:prstGeom prst="rect">
             <a:avLst/>
@@ -5848,11 +5941,11 @@
           <a:p>
             <a:pPr algn="l"/>
             <a:r>
-              <a:rPr sz="1300" b="0">
-                <a:solidFill>
-                  <a:srgbClr val="CBD5E1"/>
-                </a:solidFill>
-                <a:latin typeface="맑은 고딕"/>
+              <a:rPr sz="1200" b="0" i="0">
+                <a:solidFill>
+                  <a:srgbClr val="E2E8F0"/>
+                </a:solidFill>
+                <a:latin typeface="NanumBarunGothic"/>
               </a:rPr>
               <a:t>• 레시피 목록 / 상세 화면 개발</a:t>
             </a:r>
@@ -5861,14 +5954,14 @@
       </p:sp>
       <p:sp>
         <p:nvSpPr>
-          <p:cNvPr id="20" name="TextBox 19"/>
-          <p:cNvSpPr txBox="1"/>
-          <p:nvPr/>
-        </p:nvSpPr>
-        <p:spPr>
-          <a:xfrm>
-            <a:off x="6446520" y="4672584"/>
-            <a:ext cx="5212080" cy="594360"/>
+          <p:cNvPr id="22" name="TextBox 21"/>
+          <p:cNvSpPr txBox="1"/>
+          <p:nvPr/>
+        </p:nvSpPr>
+        <p:spPr>
+          <a:xfrm>
+            <a:off x="6400800" y="4709160"/>
+            <a:ext cx="5257800" cy="621792"/>
           </a:xfrm>
           <a:prstGeom prst="rect">
             <a:avLst/>
@@ -5883,27 +5976,27 @@
           <a:p>
             <a:pPr algn="l"/>
             <a:r>
-              <a:rPr sz="1300" b="0">
-                <a:solidFill>
-                  <a:srgbClr val="CBD5E1"/>
-                </a:solidFill>
-                <a:latin typeface="맑은 고딕"/>
-              </a:rPr>
-              <a:t>• 테스트 및 버그 리포트</a:t>
-            </a:r>
-          </a:p>
-        </p:txBody>
-      </p:sp>
-      <p:sp>
-        <p:nvSpPr>
-          <p:cNvPr id="21" name="TextBox 20"/>
-          <p:cNvSpPr txBox="1"/>
-          <p:nvPr/>
-        </p:nvSpPr>
-        <p:spPr>
-          <a:xfrm>
-            <a:off x="6446520" y="5330952"/>
-            <a:ext cx="5212080" cy="594360"/>
+              <a:rPr sz="1200" b="0" i="0">
+                <a:solidFill>
+                  <a:srgbClr val="E2E8F0"/>
+                </a:solidFill>
+                <a:latin typeface="NanumBarunGothic"/>
+              </a:rPr>
+              <a:t>• 기능 테스트 및 버그 리포트</a:t>
+            </a:r>
+          </a:p>
+        </p:txBody>
+      </p:sp>
+      <p:sp>
+        <p:nvSpPr>
+          <p:cNvPr id="23" name="TextBox 22"/>
+          <p:cNvSpPr txBox="1"/>
+          <p:nvPr/>
+        </p:nvSpPr>
+        <p:spPr>
+          <a:xfrm>
+            <a:off x="6400800" y="5394960"/>
+            <a:ext cx="5257800" cy="621792"/>
           </a:xfrm>
           <a:prstGeom prst="rect">
             <a:avLst/>
@@ -5918,11 +6011,11 @@
           <a:p>
             <a:pPr algn="l"/>
             <a:r>
-              <a:rPr sz="1300" b="0">
-                <a:solidFill>
-                  <a:srgbClr val="CBD5E1"/>
-                </a:solidFill>
-                <a:latin typeface="맑은 고딕"/>
+              <a:rPr sz="1200" b="0" i="0">
+                <a:solidFill>
+                  <a:srgbClr val="E2E8F0"/>
+                </a:solidFill>
+                <a:latin typeface="NanumBarunGothic"/>
               </a:rPr>
               <a:t>• 발표 자료 준비 · 사용자 시나리오 검토</a:t>
             </a:r>
@@ -5931,33 +6024,33 @@
       </p:sp>
       <p:sp>
         <p:nvSpPr>
-          <p:cNvPr id="22" name="TextBox 21"/>
-          <p:cNvSpPr txBox="1"/>
-          <p:nvPr/>
-        </p:nvSpPr>
-        <p:spPr>
-          <a:xfrm>
-            <a:off x="11430000" y="6492240"/>
-            <a:ext cx="731520" cy="274320"/>
-          </a:xfrm>
-          <a:prstGeom prst="rect">
-            <a:avLst/>
-          </a:prstGeom>
-          <a:noFill/>
-        </p:spPr>
-        <p:txBody>
-          <a:bodyPr wrap="square">
-            <a:spAutoFit/>
-          </a:bodyPr>
-          <a:lstStyle/>
-          <a:p>
-            <a:pPr algn="l"/>
-            <a:r>
-              <a:rPr sz="1100" b="0">
+          <p:cNvPr id="24" name="TextBox 23"/>
+          <p:cNvSpPr txBox="1"/>
+          <p:nvPr/>
+        </p:nvSpPr>
+        <p:spPr>
+          <a:xfrm>
+            <a:off x="11247120" y="6492240"/>
+            <a:ext cx="914400" cy="274320"/>
+          </a:xfrm>
+          <a:prstGeom prst="rect">
+            <a:avLst/>
+          </a:prstGeom>
+          <a:noFill/>
+        </p:spPr>
+        <p:txBody>
+          <a:bodyPr wrap="square">
+            <a:spAutoFit/>
+          </a:bodyPr>
+          <a:lstStyle/>
+          <a:p>
+            <a:pPr algn="r"/>
+            <a:r>
+              <a:rPr sz="1100" b="0" i="0">
                 <a:solidFill>
                   <a:srgbClr val="334155"/>
                 </a:solidFill>
-                <a:latin typeface="맑은 고딕"/>
+                <a:latin typeface="NanumBarunGothic"/>
               </a:rPr>
               <a:t>04 / 09</a:t>
             </a:r>
@@ -6034,7 +6127,7 @@
         <p:spPr>
           <a:xfrm>
             <a:off x="0" y="0"/>
-            <a:ext cx="73152" cy="6858000"/>
+            <a:ext cx="91440" cy="6858000"/>
           </a:xfrm>
           <a:prstGeom prst="rect">
             <a:avLst/>
@@ -6076,8 +6169,8 @@
         </p:nvSpPr>
         <p:spPr>
           <a:xfrm>
-            <a:off x="365760" y="457200"/>
-            <a:ext cx="2743200" cy="320040"/>
+            <a:off x="457200" y="411480"/>
+            <a:ext cx="3657600" cy="320040"/>
           </a:xfrm>
           <a:prstGeom prst="rect">
             <a:avLst/>
@@ -6092,13 +6185,13 @@
           <a:p>
             <a:pPr algn="l"/>
             <a:r>
-              <a:rPr sz="1100" b="1">
+              <a:rPr sz="1000" b="1" i="0">
                 <a:solidFill>
                   <a:srgbClr val="22C55E"/>
                 </a:solidFill>
-                <a:latin typeface="맑은 고딕"/>
-              </a:rPr>
-              <a:t>환경</a:t>
+                <a:latin typeface="NanumBarunGothic"/>
+              </a:rPr>
+              <a:t>개발 환경</a:t>
             </a:r>
           </a:p>
         </p:txBody>
@@ -6111,8 +6204,8 @@
         </p:nvSpPr>
         <p:spPr>
           <a:xfrm>
-            <a:off x="365760" y="822960"/>
-            <a:ext cx="7315200" cy="685800"/>
+            <a:off x="457200" y="731520"/>
+            <a:ext cx="7772400" cy="822960"/>
           </a:xfrm>
           <a:prstGeom prst="rect">
             <a:avLst/>
@@ -6127,11 +6220,11 @@
           <a:p>
             <a:pPr algn="l"/>
             <a:r>
-              <a:rPr sz="3600" b="1">
+              <a:rPr sz="3800" b="1" i="0">
                 <a:solidFill>
                   <a:srgbClr val="FFFFFF"/>
                 </a:solidFill>
-                <a:latin typeface="맑은 고딕"/>
+                <a:latin typeface="NanumBarunGothic"/>
               </a:rPr>
               <a:t>개발 환경 및 도구</a:t>
             </a:r>
@@ -6146,8 +6239,8 @@
         </p:nvSpPr>
         <p:spPr>
           <a:xfrm>
-            <a:off x="365760" y="1828800"/>
-            <a:ext cx="5486400" cy="2011680"/>
+            <a:off x="457200" y="1737360"/>
+            <a:ext cx="5577840" cy="2103120"/>
           </a:xfrm>
           <a:prstGeom prst="rect">
             <a:avLst/>
@@ -6191,8 +6284,8 @@
         </p:nvSpPr>
         <p:spPr>
           <a:xfrm>
-            <a:off x="594360" y="2011680"/>
-            <a:ext cx="5029200" cy="365760"/>
+            <a:off x="685800" y="1920240"/>
+            <a:ext cx="5212080" cy="384048"/>
           </a:xfrm>
           <a:prstGeom prst="rect">
             <a:avLst/>
@@ -6207,11 +6300,11 @@
           <a:p>
             <a:pPr algn="l"/>
             <a:r>
-              <a:rPr sz="1400" b="1">
+              <a:rPr sz="1500" b="1" i="0">
                 <a:solidFill>
                   <a:srgbClr val="22C55E"/>
                 </a:solidFill>
-                <a:latin typeface="맑은 고딕"/>
+                <a:latin typeface="NanumBarunGothic"/>
               </a:rPr>
               <a:t>📱 프론트엔드</a:t>
             </a:r>
@@ -6226,8 +6319,8 @@
         </p:nvSpPr>
         <p:spPr>
           <a:xfrm>
-            <a:off x="594360" y="2423160"/>
-            <a:ext cx="5029200" cy="1280160"/>
+            <a:off x="685800" y="2395728"/>
+            <a:ext cx="5212080" cy="1280160"/>
           </a:xfrm>
           <a:prstGeom prst="rect">
             <a:avLst/>
@@ -6242,15 +6335,15 @@
           <a:p>
             <a:pPr algn="l"/>
             <a:r>
-              <a:rPr sz="1300" b="0">
+              <a:rPr sz="1200" b="0" i="0">
                 <a:solidFill>
                   <a:srgbClr val="94A3B8"/>
                 </a:solidFill>
-                <a:latin typeface="맑은 고딕"/>
+                <a:latin typeface="NanumBarunGothic"/>
               </a:rPr>
               <a:t>Flutter 3.32 / Dart
-Provider · SQLite(sqflite)
-Google Fonts · Lottie</a:t>
+Provider (상태관리) · SQLite (sqflite)
+Google Fonts · Lottie 애니메이션</a:t>
             </a:r>
           </a:p>
         </p:txBody>
@@ -6263,8 +6356,8 @@
         </p:nvSpPr>
         <p:spPr>
           <a:xfrm>
-            <a:off x="6217920" y="1828800"/>
-            <a:ext cx="5486400" cy="2011680"/>
+            <a:off x="6355080" y="1737360"/>
+            <a:ext cx="5577840" cy="2103120"/>
           </a:xfrm>
           <a:prstGeom prst="rect">
             <a:avLst/>
@@ -6308,8 +6401,8 @@
         </p:nvSpPr>
         <p:spPr>
           <a:xfrm>
-            <a:off x="6446520" y="2011680"/>
-            <a:ext cx="5029200" cy="365760"/>
+            <a:off x="6583680" y="1920240"/>
+            <a:ext cx="5212080" cy="384048"/>
           </a:xfrm>
           <a:prstGeom prst="rect">
             <a:avLst/>
@@ -6324,11 +6417,11 @@
           <a:p>
             <a:pPr algn="l"/>
             <a:r>
-              <a:rPr sz="1400" b="1">
+              <a:rPr sz="1500" b="1" i="0">
                 <a:solidFill>
                   <a:srgbClr val="22C55E"/>
                 </a:solidFill>
-                <a:latin typeface="맑은 고딕"/>
+                <a:latin typeface="NanumBarunGothic"/>
               </a:rPr>
               <a:t>🤖 AI / ML</a:t>
             </a:r>
@@ -6343,8 +6436,8 @@
         </p:nvSpPr>
         <p:spPr>
           <a:xfrm>
-            <a:off x="6446520" y="2423160"/>
-            <a:ext cx="5029200" cy="1280160"/>
+            <a:off x="6583680" y="2395728"/>
+            <a:ext cx="5212080" cy="1280160"/>
           </a:xfrm>
           <a:prstGeom prst="rect">
             <a:avLst/>
@@ -6359,16 +6452,16 @@
           <a:p>
             <a:pPr algn="l"/>
             <a:r>
-              <a:rPr sz="1300" b="0">
+              <a:rPr sz="1200" b="0" i="0">
                 <a:solidFill>
                   <a:srgbClr val="94A3B8"/>
                 </a:solidFill>
-                <a:latin typeface="맑은 고딕"/>
+                <a:latin typeface="NanumBarunGothic"/>
               </a:rPr>
               <a:t>tflite_flutter 0.12.1
-MobileNetV2 (ImageNet)
-Kaggle Tesla T4 GPU
-INT8 Quantization</a:t>
+MobileNetV2 (ImageNet Pretrained)
+TensorFlow 2.x · Kaggle Tesla T4 GPU
+INT8 Dynamic Range Quantization</a:t>
             </a:r>
           </a:p>
         </p:txBody>
@@ -6381,8 +6474,8 @@
         </p:nvSpPr>
         <p:spPr>
           <a:xfrm>
-            <a:off x="365760" y="4114800"/>
-            <a:ext cx="5486400" cy="2011680"/>
+            <a:off x="457200" y="4069079"/>
+            <a:ext cx="5577840" cy="2103120"/>
           </a:xfrm>
           <a:prstGeom prst="rect">
             <a:avLst/>
@@ -6426,8 +6519,8 @@
         </p:nvSpPr>
         <p:spPr>
           <a:xfrm>
-            <a:off x="594360" y="4297680"/>
-            <a:ext cx="5029200" cy="365760"/>
+            <a:off x="685800" y="4251959"/>
+            <a:ext cx="5212080" cy="384048"/>
           </a:xfrm>
           <a:prstGeom prst="rect">
             <a:avLst/>
@@ -6442,13 +6535,13 @@
           <a:p>
             <a:pPr algn="l"/>
             <a:r>
-              <a:rPr sz="1400" b="1">
+              <a:rPr sz="1500" b="1" i="0">
                 <a:solidFill>
                   <a:srgbClr val="22C55E"/>
                 </a:solidFill>
-                <a:latin typeface="맑은 고딕"/>
-              </a:rPr>
-              <a:t>🔌 API</a:t>
+                <a:latin typeface="NanumBarunGothic"/>
+              </a:rPr>
+              <a:t>🔌 API 연동</a:t>
             </a:r>
           </a:p>
         </p:txBody>
@@ -6461,8 +6554,8 @@
         </p:nvSpPr>
         <p:spPr>
           <a:xfrm>
-            <a:off x="594360" y="4709160"/>
-            <a:ext cx="5029200" cy="1280160"/>
+            <a:off x="685800" y="4727447"/>
+            <a:ext cx="5212080" cy="1280160"/>
           </a:xfrm>
           <a:prstGeom prst="rect">
             <a:avLst/>
@@ -6477,15 +6570,15 @@
           <a:p>
             <a:pPr algn="l"/>
             <a:r>
-              <a:rPr sz="1300" b="0">
+              <a:rPr sz="1200" b="0" i="0">
                 <a:solidFill>
                   <a:srgbClr val="94A3B8"/>
                 </a:solidFill>
-                <a:latin typeface="맑은 고딕"/>
+                <a:latin typeface="NanumBarunGothic"/>
               </a:rPr>
               <a:t>식품안전처 레시피 API
-Spoonacular API
-Kakao / Google 소셜 로그인</a:t>
+Spoonacular 이미지 AI
+Kakao 소셜 로그인 · Google OAuth</a:t>
             </a:r>
           </a:p>
         </p:txBody>
@@ -6498,8 +6591,8 @@
         </p:nvSpPr>
         <p:spPr>
           <a:xfrm>
-            <a:off x="6217920" y="4114800"/>
-            <a:ext cx="5486400" cy="2011680"/>
+            <a:off x="6355080" y="4069079"/>
+            <a:ext cx="5577840" cy="2103120"/>
           </a:xfrm>
           <a:prstGeom prst="rect">
             <a:avLst/>
@@ -6543,8 +6636,8 @@
         </p:nvSpPr>
         <p:spPr>
           <a:xfrm>
-            <a:off x="6446520" y="4297680"/>
-            <a:ext cx="5029200" cy="365760"/>
+            <a:off x="6583680" y="4251959"/>
+            <a:ext cx="5212080" cy="384048"/>
           </a:xfrm>
           <a:prstGeom prst="rect">
             <a:avLst/>
@@ -6559,13 +6652,13 @@
           <a:p>
             <a:pPr algn="l"/>
             <a:r>
-              <a:rPr sz="1400" b="1">
+              <a:rPr sz="1500" b="1" i="0">
                 <a:solidFill>
                   <a:srgbClr val="22C55E"/>
                 </a:solidFill>
-                <a:latin typeface="맑은 고딕"/>
-              </a:rPr>
-              <a:t>⚙️ 빌드</a:t>
+                <a:latin typeface="NanumBarunGothic"/>
+              </a:rPr>
+              <a:t>⚙️ 빌드/배포</a:t>
             </a:r>
           </a:p>
         </p:txBody>
@@ -6578,8 +6671,8 @@
         </p:nvSpPr>
         <p:spPr>
           <a:xfrm>
-            <a:off x="6446520" y="4709160"/>
-            <a:ext cx="5029200" cy="1280160"/>
+            <a:off x="6583680" y="4727447"/>
+            <a:ext cx="5212080" cy="1280160"/>
           </a:xfrm>
           <a:prstGeom prst="rect">
             <a:avLst/>
@@ -6594,16 +6687,16 @@
           <a:p>
             <a:pPr algn="l"/>
             <a:r>
-              <a:rPr sz="1300" b="0">
+              <a:rPr sz="1200" b="0" i="0">
                 <a:solidFill>
                   <a:srgbClr val="94A3B8"/>
                 </a:solidFill>
-                <a:latin typeface="맑은 고딕"/>
-              </a:rPr>
-              <a:t>Android (minSdk 21)
+                <a:latin typeface="NanumBarunGothic"/>
+              </a:rPr>
+              <a:t>Android minSdk 21 / targetSdk 34
 Gradle Kotlin DSL
-TFLite noCompress
-Galaxy S25 Ultra</a:t>
+TFLite noCompress 설정
+Galaxy S25 Ultra 실기기 테스트</a:t>
             </a:r>
           </a:p>
         </p:txBody>
@@ -6616,27 +6709,27 @@
         </p:nvSpPr>
         <p:spPr>
           <a:xfrm>
-            <a:off x="11430000" y="6492240"/>
-            <a:ext cx="731520" cy="274320"/>
-          </a:xfrm>
-          <a:prstGeom prst="rect">
-            <a:avLst/>
-          </a:prstGeom>
-          <a:noFill/>
-        </p:spPr>
-        <p:txBody>
-          <a:bodyPr wrap="square">
-            <a:spAutoFit/>
-          </a:bodyPr>
-          <a:lstStyle/>
-          <a:p>
-            <a:pPr algn="l"/>
-            <a:r>
-              <a:rPr sz="1100" b="0">
+            <a:off x="11247120" y="6492240"/>
+            <a:ext cx="914400" cy="274320"/>
+          </a:xfrm>
+          <a:prstGeom prst="rect">
+            <a:avLst/>
+          </a:prstGeom>
+          <a:noFill/>
+        </p:spPr>
+        <p:txBody>
+          <a:bodyPr wrap="square">
+            <a:spAutoFit/>
+          </a:bodyPr>
+          <a:lstStyle/>
+          <a:p>
+            <a:pPr algn="r"/>
+            <a:r>
+              <a:rPr sz="1100" b="0" i="0">
                 <a:solidFill>
                   <a:srgbClr val="334155"/>
                 </a:solidFill>
-                <a:latin typeface="맑은 고딕"/>
+                <a:latin typeface="NanumBarunGothic"/>
               </a:rPr>
               <a:t>05 / 09</a:t>
             </a:r>
@@ -6713,7 +6806,7 @@
         <p:spPr>
           <a:xfrm>
             <a:off x="0" y="0"/>
-            <a:ext cx="73152" cy="6858000"/>
+            <a:ext cx="91440" cy="6858000"/>
           </a:xfrm>
           <a:prstGeom prst="rect">
             <a:avLst/>
@@ -6755,8 +6848,8 @@
         </p:nvSpPr>
         <p:spPr>
           <a:xfrm>
-            <a:off x="365760" y="457200"/>
-            <a:ext cx="2743200" cy="320040"/>
+            <a:off x="457200" y="411480"/>
+            <a:ext cx="3657600" cy="320040"/>
           </a:xfrm>
           <a:prstGeom prst="rect">
             <a:avLst/>
@@ -6771,13 +6864,13 @@
           <a:p>
             <a:pPr algn="l"/>
             <a:r>
-              <a:rPr sz="1100" b="1">
+              <a:rPr sz="1000" b="1" i="0">
                 <a:solidFill>
                   <a:srgbClr val="22C55E"/>
                 </a:solidFill>
-                <a:latin typeface="맑은 고딕"/>
-              </a:rPr>
-              <a:t>기능</a:t>
+                <a:latin typeface="NanumBarunGothic"/>
+              </a:rPr>
+              <a:t>기  능</a:t>
             </a:r>
           </a:p>
         </p:txBody>
@@ -6790,8 +6883,8 @@
         </p:nvSpPr>
         <p:spPr>
           <a:xfrm>
-            <a:off x="365760" y="822960"/>
-            <a:ext cx="7315200" cy="685800"/>
+            <a:off x="457200" y="731520"/>
+            <a:ext cx="7772400" cy="822960"/>
           </a:xfrm>
           <a:prstGeom prst="rect">
             <a:avLst/>
@@ -6806,11 +6899,11 @@
           <a:p>
             <a:pPr algn="l"/>
             <a:r>
-              <a:rPr sz="3600" b="1">
+              <a:rPr sz="3800" b="1" i="0">
                 <a:solidFill>
                   <a:srgbClr val="FFFFFF"/>
                 </a:solidFill>
-                <a:latin typeface="맑은 고딕"/>
+                <a:latin typeface="NanumBarunGothic"/>
               </a:rPr>
               <a:t>주요 기능 및 기술</a:t>
             </a:r>
@@ -6826,13 +6919,13 @@
         <p:spPr>
           <a:xfrm>
             <a:off x="457200" y="1737360"/>
-            <a:ext cx="2103120" cy="1005840"/>
+            <a:ext cx="2011680" cy="1005840"/>
           </a:xfrm>
           <a:prstGeom prst="rect">
             <a:avLst/>
           </a:prstGeom>
           <a:solidFill>
-            <a:srgbClr val="0D2818"/>
+            <a:srgbClr val="0F1F14"/>
           </a:solidFill>
           <a:ln w="12700">
             <a:solidFill>
@@ -6870,8 +6963,8 @@
         </p:nvSpPr>
         <p:spPr>
           <a:xfrm>
-            <a:off x="1188720" y="1810512"/>
-            <a:ext cx="731520" cy="411480"/>
+            <a:off x="457200" y="1783080"/>
+            <a:ext cx="2011680" cy="502920"/>
           </a:xfrm>
           <a:prstGeom prst="rect">
             <a:avLst/>
@@ -6886,11 +6979,11 @@
           <a:p>
             <a:pPr algn="ctr"/>
             <a:r>
-              <a:rPr sz="2200" b="0">
+              <a:rPr sz="2400" b="0" i="0">
                 <a:solidFill>
                   <a:srgbClr val="FFFFFF"/>
                 </a:solidFill>
-                <a:latin typeface="맑은 고딕"/>
+                <a:latin typeface="NanumBarunGothic"/>
               </a:rPr>
               <a:t>📸</a:t>
             </a:r>
@@ -6905,8 +6998,8 @@
         </p:nvSpPr>
         <p:spPr>
           <a:xfrm>
-            <a:off x="548640" y="2240280"/>
-            <a:ext cx="1920240" cy="365760"/>
+            <a:off x="457200" y="2304288"/>
+            <a:ext cx="2011680" cy="365760"/>
           </a:xfrm>
           <a:prstGeom prst="rect">
             <a:avLst/>
@@ -6921,11 +7014,11 @@
           <a:p>
             <a:pPr algn="ctr"/>
             <a:r>
-              <a:rPr sz="1300" b="1">
+              <a:rPr sz="1300" b="1" i="0">
                 <a:solidFill>
                   <a:srgbClr val="22C55E"/>
                 </a:solidFill>
-                <a:latin typeface="맑은 고딕"/>
+                <a:latin typeface="NanumBarunGothic"/>
               </a:rPr>
               <a:t>카메라 촬영</a:t>
             </a:r>
@@ -6940,8 +7033,8 @@
         </p:nvSpPr>
         <p:spPr>
           <a:xfrm>
-            <a:off x="2377440" y="1965960"/>
-            <a:ext cx="457200" cy="411480"/>
+            <a:off x="2286000" y="2029968"/>
+            <a:ext cx="365760" cy="411480"/>
           </a:xfrm>
           <a:prstGeom prst="rect">
             <a:avLst/>
@@ -6956,11 +7049,11 @@
           <a:p>
             <a:pPr algn="ctr"/>
             <a:r>
-              <a:rPr sz="2200" b="0">
+              <a:rPr sz="2000" b="0" i="0">
                 <a:solidFill>
                   <a:srgbClr val="22C55E"/>
                 </a:solidFill>
-                <a:latin typeface="맑은 고딕"/>
+                <a:latin typeface="NanumBarunGothic"/>
               </a:rPr>
               <a:t>→</a:t>
             </a:r>
@@ -6975,14 +7068,14 @@
         </p:nvSpPr>
         <p:spPr>
           <a:xfrm>
-            <a:off x="2788920" y="1737360"/>
-            <a:ext cx="2103120" cy="1005840"/>
+            <a:off x="2670048" y="1737360"/>
+            <a:ext cx="2011680" cy="1005840"/>
           </a:xfrm>
           <a:prstGeom prst="rect">
             <a:avLst/>
           </a:prstGeom>
           <a:solidFill>
-            <a:srgbClr val="0D2818"/>
+            <a:srgbClr val="0F1F14"/>
           </a:solidFill>
           <a:ln w="12700">
             <a:solidFill>
@@ -7020,8 +7113,8 @@
         </p:nvSpPr>
         <p:spPr>
           <a:xfrm>
-            <a:off x="3520440" y="1810512"/>
-            <a:ext cx="731520" cy="411480"/>
+            <a:off x="2670048" y="1783080"/>
+            <a:ext cx="2011680" cy="502920"/>
           </a:xfrm>
           <a:prstGeom prst="rect">
             <a:avLst/>
@@ -7036,11 +7129,11 @@
           <a:p>
             <a:pPr algn="ctr"/>
             <a:r>
-              <a:rPr sz="2200" b="0">
+              <a:rPr sz="2400" b="0" i="0">
                 <a:solidFill>
                   <a:srgbClr val="FFFFFF"/>
                 </a:solidFill>
-                <a:latin typeface="맑은 고딕"/>
+                <a:latin typeface="NanumBarunGothic"/>
               </a:rPr>
               <a:t>🧠</a:t>
             </a:r>
@@ -7055,8 +7148,8 @@
         </p:nvSpPr>
         <p:spPr>
           <a:xfrm>
-            <a:off x="2880360" y="2240280"/>
-            <a:ext cx="1920240" cy="365760"/>
+            <a:off x="2670048" y="2304288"/>
+            <a:ext cx="2011680" cy="365760"/>
           </a:xfrm>
           <a:prstGeom prst="rect">
             <a:avLst/>
@@ -7071,11 +7164,11 @@
           <a:p>
             <a:pPr algn="ctr"/>
             <a:r>
-              <a:rPr sz="1300" b="1">
+              <a:rPr sz="1300" b="1" i="0">
                 <a:solidFill>
                   <a:srgbClr val="22C55E"/>
                 </a:solidFill>
-                <a:latin typeface="맑은 고딕"/>
+                <a:latin typeface="NanumBarunGothic"/>
               </a:rPr>
               <a:t>AI 인식</a:t>
             </a:r>
@@ -7090,8 +7183,8 @@
         </p:nvSpPr>
         <p:spPr>
           <a:xfrm>
-            <a:off x="4709160" y="1965960"/>
-            <a:ext cx="457200" cy="411480"/>
+            <a:off x="4498848" y="2029968"/>
+            <a:ext cx="365760" cy="411480"/>
           </a:xfrm>
           <a:prstGeom prst="rect">
             <a:avLst/>
@@ -7106,11 +7199,11 @@
           <a:p>
             <a:pPr algn="ctr"/>
             <a:r>
-              <a:rPr sz="2200" b="0">
+              <a:rPr sz="2000" b="0" i="0">
                 <a:solidFill>
                   <a:srgbClr val="22C55E"/>
                 </a:solidFill>
-                <a:latin typeface="맑은 고딕"/>
+                <a:latin typeface="NanumBarunGothic"/>
               </a:rPr>
               <a:t>→</a:t>
             </a:r>
@@ -7125,14 +7218,14 @@
         </p:nvSpPr>
         <p:spPr>
           <a:xfrm>
-            <a:off x="5120640" y="1737360"/>
-            <a:ext cx="2103120" cy="1005840"/>
+            <a:off x="4882896" y="1737360"/>
+            <a:ext cx="2011680" cy="1005840"/>
           </a:xfrm>
           <a:prstGeom prst="rect">
             <a:avLst/>
           </a:prstGeom>
           <a:solidFill>
-            <a:srgbClr val="0D2818"/>
+            <a:srgbClr val="0F1F14"/>
           </a:solidFill>
           <a:ln w="12700">
             <a:solidFill>
@@ -7170,8 +7263,8 @@
         </p:nvSpPr>
         <p:spPr>
           <a:xfrm>
-            <a:off x="5852160" y="1810512"/>
-            <a:ext cx="731520" cy="411480"/>
+            <a:off x="4882896" y="1783080"/>
+            <a:ext cx="2011680" cy="502920"/>
           </a:xfrm>
           <a:prstGeom prst="rect">
             <a:avLst/>
@@ -7186,11 +7279,11 @@
           <a:p>
             <a:pPr algn="ctr"/>
             <a:r>
-              <a:rPr sz="2200" b="0">
+              <a:rPr sz="2400" b="0" i="0">
                 <a:solidFill>
                   <a:srgbClr val="FFFFFF"/>
                 </a:solidFill>
-                <a:latin typeface="맑은 고딕"/>
+                <a:latin typeface="NanumBarunGothic"/>
               </a:rPr>
               <a:t>🧊</a:t>
             </a:r>
@@ -7205,8 +7298,8 @@
         </p:nvSpPr>
         <p:spPr>
           <a:xfrm>
-            <a:off x="5212080" y="2240280"/>
-            <a:ext cx="1920240" cy="365760"/>
+            <a:off x="4882896" y="2304288"/>
+            <a:ext cx="2011680" cy="365760"/>
           </a:xfrm>
           <a:prstGeom prst="rect">
             <a:avLst/>
@@ -7221,11 +7314,11 @@
           <a:p>
             <a:pPr algn="ctr"/>
             <a:r>
-              <a:rPr sz="1300" b="1">
+              <a:rPr sz="1300" b="1" i="0">
                 <a:solidFill>
                   <a:srgbClr val="22C55E"/>
                 </a:solidFill>
-                <a:latin typeface="맑은 고딕"/>
+                <a:latin typeface="NanumBarunGothic"/>
               </a:rPr>
               <a:t>냉장고 등록</a:t>
             </a:r>
@@ -7240,8 +7333,8 @@
         </p:nvSpPr>
         <p:spPr>
           <a:xfrm>
-            <a:off x="7040879" y="1965960"/>
-            <a:ext cx="457200" cy="411480"/>
+            <a:off x="6711696" y="2029968"/>
+            <a:ext cx="365760" cy="411480"/>
           </a:xfrm>
           <a:prstGeom prst="rect">
             <a:avLst/>
@@ -7256,11 +7349,11 @@
           <a:p>
             <a:pPr algn="ctr"/>
             <a:r>
-              <a:rPr sz="2200" b="0">
+              <a:rPr sz="2000" b="0" i="0">
                 <a:solidFill>
                   <a:srgbClr val="22C55E"/>
                 </a:solidFill>
-                <a:latin typeface="맑은 고딕"/>
+                <a:latin typeface="NanumBarunGothic"/>
               </a:rPr>
               <a:t>→</a:t>
             </a:r>
@@ -7275,14 +7368,14 @@
         </p:nvSpPr>
         <p:spPr>
           <a:xfrm>
-            <a:off x="7452359" y="1737360"/>
-            <a:ext cx="2103120" cy="1005840"/>
+            <a:off x="7095744" y="1737360"/>
+            <a:ext cx="2011680" cy="1005840"/>
           </a:xfrm>
           <a:prstGeom prst="rect">
             <a:avLst/>
           </a:prstGeom>
           <a:solidFill>
-            <a:srgbClr val="0D2818"/>
+            <a:srgbClr val="0F1F14"/>
           </a:solidFill>
           <a:ln w="12700">
             <a:solidFill>
@@ -7320,8 +7413,8 @@
         </p:nvSpPr>
         <p:spPr>
           <a:xfrm>
-            <a:off x="8183879" y="1810512"/>
-            <a:ext cx="731520" cy="411480"/>
+            <a:off x="7095744" y="1783080"/>
+            <a:ext cx="2011680" cy="502920"/>
           </a:xfrm>
           <a:prstGeom prst="rect">
             <a:avLst/>
@@ -7336,11 +7429,11 @@
           <a:p>
             <a:pPr algn="ctr"/>
             <a:r>
-              <a:rPr sz="2200" b="0">
+              <a:rPr sz="2400" b="0" i="0">
                 <a:solidFill>
                   <a:srgbClr val="FFFFFF"/>
                 </a:solidFill>
-                <a:latin typeface="맑은 고딕"/>
+                <a:latin typeface="NanumBarunGothic"/>
               </a:rPr>
               <a:t>🍳</a:t>
             </a:r>
@@ -7355,8 +7448,8 @@
         </p:nvSpPr>
         <p:spPr>
           <a:xfrm>
-            <a:off x="7543799" y="2240280"/>
-            <a:ext cx="1920240" cy="365760"/>
+            <a:off x="7095744" y="2304288"/>
+            <a:ext cx="2011680" cy="365760"/>
           </a:xfrm>
           <a:prstGeom prst="rect">
             <a:avLst/>
@@ -7371,11 +7464,11 @@
           <a:p>
             <a:pPr algn="ctr"/>
             <a:r>
-              <a:rPr sz="1300" b="1">
+              <a:rPr sz="1300" b="1" i="0">
                 <a:solidFill>
                   <a:srgbClr val="22C55E"/>
                 </a:solidFill>
-                <a:latin typeface="맑은 고딕"/>
+                <a:latin typeface="NanumBarunGothic"/>
               </a:rPr>
               <a:t>레시피 추천</a:t>
             </a:r>
@@ -7390,8 +7483,8 @@
         </p:nvSpPr>
         <p:spPr>
           <a:xfrm>
-            <a:off x="365760" y="2971800"/>
-            <a:ext cx="7772400" cy="960120"/>
+            <a:off x="457200" y="2926080"/>
+            <a:ext cx="8046720" cy="987552"/>
           </a:xfrm>
           <a:prstGeom prst="rect">
             <a:avLst/>
@@ -7435,8 +7528,8 @@
         </p:nvSpPr>
         <p:spPr>
           <a:xfrm>
-            <a:off x="594360" y="3044952"/>
-            <a:ext cx="4572000" cy="347472"/>
+            <a:off x="685800" y="3035808"/>
+            <a:ext cx="4572000" cy="365760"/>
           </a:xfrm>
           <a:prstGeom prst="rect">
             <a:avLst/>
@@ -7451,11 +7544,11 @@
           <a:p>
             <a:pPr algn="l"/>
             <a:r>
-              <a:rPr sz="1400" b="1">
+              <a:rPr sz="1400" b="1" i="0">
                 <a:solidFill>
                   <a:srgbClr val="22C55E"/>
                 </a:solidFill>
-                <a:latin typeface="맑은 고딕"/>
+                <a:latin typeface="NanumBarunGothic"/>
               </a:rPr>
               <a:t>🤖 온디바이스 TinyML</a:t>
             </a:r>
@@ -7470,8 +7563,8 @@
         </p:nvSpPr>
         <p:spPr>
           <a:xfrm>
-            <a:off x="594360" y="3392424"/>
-            <a:ext cx="7223760" cy="320040"/>
+            <a:off x="685800" y="3447287"/>
+            <a:ext cx="7498079" cy="347472"/>
           </a:xfrm>
           <a:prstGeom prst="rect">
             <a:avLst/>
@@ -7486,11 +7579,11 @@
           <a:p>
             <a:pPr algn="l"/>
             <a:r>
-              <a:rPr sz="1200" b="0">
+              <a:rPr sz="1200" b="0" i="0">
                 <a:solidFill>
                   <a:srgbClr val="94A3B8"/>
                 </a:solidFill>
-                <a:latin typeface="맑은 고딕"/>
+                <a:latin typeface="NanumBarunGothic"/>
               </a:rPr>
               <a:t>MobileNetV2 2.7MB · 36종 식재료 · 수량 자동 추정 · 인터넷 불필요</a:t>
             </a:r>
@@ -7505,8 +7598,8 @@
         </p:nvSpPr>
         <p:spPr>
           <a:xfrm>
-            <a:off x="365760" y="4069080"/>
-            <a:ext cx="7772400" cy="960120"/>
+            <a:off x="457200" y="4041648"/>
+            <a:ext cx="8046720" cy="987552"/>
           </a:xfrm>
           <a:prstGeom prst="rect">
             <a:avLst/>
@@ -7550,8 +7643,8 @@
         </p:nvSpPr>
         <p:spPr>
           <a:xfrm>
-            <a:off x="594360" y="4142232"/>
-            <a:ext cx="4572000" cy="347472"/>
+            <a:off x="685800" y="4151376"/>
+            <a:ext cx="4572000" cy="365760"/>
           </a:xfrm>
           <a:prstGeom prst="rect">
             <a:avLst/>
@@ -7566,11 +7659,11 @@
           <a:p>
             <a:pPr algn="l"/>
             <a:r>
-              <a:rPr sz="1400" b="1">
+              <a:rPr sz="1400" b="1" i="0">
                 <a:solidFill>
                   <a:srgbClr val="22C55E"/>
                 </a:solidFill>
-                <a:latin typeface="맑은 고딕"/>
+                <a:latin typeface="NanumBarunGothic"/>
               </a:rPr>
               <a:t>📋 냉장고 재고 관리</a:t>
             </a:r>
@@ -7585,8 +7678,8 @@
         </p:nvSpPr>
         <p:spPr>
           <a:xfrm>
-            <a:off x="594360" y="4489704"/>
-            <a:ext cx="7223760" cy="320040"/>
+            <a:off x="685800" y="4562855"/>
+            <a:ext cx="7498079" cy="347472"/>
           </a:xfrm>
           <a:prstGeom prst="rect">
             <a:avLst/>
@@ -7601,11 +7694,11 @@
           <a:p>
             <a:pPr algn="l"/>
             <a:r>
-              <a:rPr sz="1200" b="0">
+              <a:rPr sz="1200" b="0" i="0">
                 <a:solidFill>
                   <a:srgbClr val="94A3B8"/>
                 </a:solidFill>
-                <a:latin typeface="맑은 고딕"/>
+                <a:latin typeface="NanumBarunGothic"/>
               </a:rPr>
               <a:t>유통기한 D-Day 알림 · 카테고리 분류 · 슬라이드 삭제 · 실시간 동기화</a:t>
             </a:r>
@@ -7620,8 +7713,8 @@
         </p:nvSpPr>
         <p:spPr>
           <a:xfrm>
-            <a:off x="365760" y="5166360"/>
-            <a:ext cx="7772400" cy="960120"/>
+            <a:off x="457200" y="5157216"/>
+            <a:ext cx="8046720" cy="987552"/>
           </a:xfrm>
           <a:prstGeom prst="rect">
             <a:avLst/>
@@ -7665,8 +7758,8 @@
         </p:nvSpPr>
         <p:spPr>
           <a:xfrm>
-            <a:off x="594360" y="5239512"/>
-            <a:ext cx="4572000" cy="347472"/>
+            <a:off x="685800" y="5266944"/>
+            <a:ext cx="4572000" cy="365760"/>
           </a:xfrm>
           <a:prstGeom prst="rect">
             <a:avLst/>
@@ -7681,11 +7774,11 @@
           <a:p>
             <a:pPr algn="l"/>
             <a:r>
-              <a:rPr sz="1400" b="1">
+              <a:rPr sz="1400" b="1" i="0">
                 <a:solidFill>
                   <a:srgbClr val="22C55E"/>
                 </a:solidFill>
-                <a:latin typeface="맑은 고딕"/>
+                <a:latin typeface="NanumBarunGothic"/>
               </a:rPr>
               <a:t>🍽️ 레시피 추천</a:t>
             </a:r>
@@ -7700,8 +7793,8 @@
         </p:nvSpPr>
         <p:spPr>
           <a:xfrm>
-            <a:off x="594360" y="5586983"/>
-            <a:ext cx="7223760" cy="320040"/>
+            <a:off x="685800" y="5678423"/>
+            <a:ext cx="7498079" cy="347472"/>
           </a:xfrm>
           <a:prstGeom prst="rect">
             <a:avLst/>
@@ -7716,13 +7809,13 @@
           <a:p>
             <a:pPr algn="l"/>
             <a:r>
-              <a:rPr sz="1200" b="0">
+              <a:rPr sz="1200" b="0" i="0">
                 <a:solidFill>
                   <a:srgbClr val="94A3B8"/>
                 </a:solidFill>
-                <a:latin typeface="맑은 고딕"/>
-              </a:rPr>
-              <a:t>보유 식재료 기반 · 식품안전처 DB · 영양 정보 · 조리 시간 안내</a:t>
+                <a:latin typeface="NanumBarunGothic"/>
+              </a:rPr>
+              <a:t>보유 재료 기반 자동 추천 · 식품안전처 DB · 영양 정보 · 조리 시간 안내</a:t>
             </a:r>
           </a:p>
         </p:txBody>
@@ -7743,8 +7836,8 @@
         </p:blipFill>
         <p:spPr>
           <a:xfrm>
-            <a:off x="8503920" y="1371600"/>
-            <a:ext cx="1828800" cy="3255264"/>
+            <a:off x="8778240" y="1371600"/>
+            <a:ext cx="1920240" cy="3419856"/>
           </a:xfrm>
           <a:prstGeom prst="rect">
             <a:avLst/>
@@ -7759,27 +7852,27 @@
         </p:nvSpPr>
         <p:spPr>
           <a:xfrm>
-            <a:off x="11430000" y="6492240"/>
-            <a:ext cx="731520" cy="274320"/>
-          </a:xfrm>
-          <a:prstGeom prst="rect">
-            <a:avLst/>
-          </a:prstGeom>
-          <a:noFill/>
-        </p:spPr>
-        <p:txBody>
-          <a:bodyPr wrap="square">
-            <a:spAutoFit/>
-          </a:bodyPr>
-          <a:lstStyle/>
-          <a:p>
-            <a:pPr algn="l"/>
-            <a:r>
-              <a:rPr sz="1100" b="0">
+            <a:off x="11247120" y="6492240"/>
+            <a:ext cx="914400" cy="274320"/>
+          </a:xfrm>
+          <a:prstGeom prst="rect">
+            <a:avLst/>
+          </a:prstGeom>
+          <a:noFill/>
+        </p:spPr>
+        <p:txBody>
+          <a:bodyPr wrap="square">
+            <a:spAutoFit/>
+          </a:bodyPr>
+          <a:lstStyle/>
+          <a:p>
+            <a:pPr algn="r"/>
+            <a:r>
+              <a:rPr sz="1100" b="0" i="0">
                 <a:solidFill>
                   <a:srgbClr val="334155"/>
                 </a:solidFill>
-                <a:latin typeface="맑은 고딕"/>
+                <a:latin typeface="NanumBarunGothic"/>
               </a:rPr>
               <a:t>06 / 09</a:t>
             </a:r>
@@ -7856,7 +7949,7 @@
         <p:spPr>
           <a:xfrm>
             <a:off x="0" y="0"/>
-            <a:ext cx="73152" cy="6858000"/>
+            <a:ext cx="91440" cy="6858000"/>
           </a:xfrm>
           <a:prstGeom prst="rect">
             <a:avLst/>
@@ -7898,8 +7991,8 @@
         </p:nvSpPr>
         <p:spPr>
           <a:xfrm>
-            <a:off x="365760" y="457200"/>
-            <a:ext cx="2743200" cy="320040"/>
+            <a:off x="457200" y="411480"/>
+            <a:ext cx="3657600" cy="320040"/>
           </a:xfrm>
           <a:prstGeom prst="rect">
             <a:avLst/>
@@ -7914,13 +8007,13 @@
           <a:p>
             <a:pPr algn="l"/>
             <a:r>
-              <a:rPr sz="1100" b="1">
+              <a:rPr sz="1000" b="1" i="0">
                 <a:solidFill>
                   <a:srgbClr val="22C55E"/>
                 </a:solidFill>
-                <a:latin typeface="맑은 고딕"/>
-              </a:rPr>
-              <a:t>진척도</a:t>
+                <a:latin typeface="NanumBarunGothic"/>
+              </a:rPr>
+              <a:t>진 척 도</a:t>
             </a:r>
           </a:p>
         </p:txBody>
@@ -7933,8 +8026,8 @@
         </p:nvSpPr>
         <p:spPr>
           <a:xfrm>
-            <a:off x="365760" y="822960"/>
-            <a:ext cx="7315200" cy="685800"/>
+            <a:off x="457200" y="731520"/>
+            <a:ext cx="7772400" cy="822960"/>
           </a:xfrm>
           <a:prstGeom prst="rect">
             <a:avLst/>
@@ -7949,11 +8042,11 @@
           <a:p>
             <a:pPr algn="l"/>
             <a:r>
-              <a:rPr sz="3600" b="1">
+              <a:rPr sz="3800" b="1" i="0">
                 <a:solidFill>
                   <a:srgbClr val="FFFFFF"/>
                 </a:solidFill>
-                <a:latin typeface="맑은 고딕"/>
+                <a:latin typeface="NanumBarunGothic"/>
               </a:rPr>
               <a:t>완성도 및 기능 단위 진척도</a:t>
             </a:r>
@@ -7968,8 +8061,8 @@
         </p:nvSpPr>
         <p:spPr>
           <a:xfrm>
-            <a:off x="365760" y="1828800"/>
-            <a:ext cx="3657600" cy="347472"/>
+            <a:off x="457200" y="1691640"/>
+            <a:ext cx="3657600" cy="320040"/>
           </a:xfrm>
           <a:prstGeom prst="rect">
             <a:avLst/>
@@ -7984,11 +8077,11 @@
           <a:p>
             <a:pPr algn="l"/>
             <a:r>
-              <a:rPr sz="1400" b="1">
+              <a:rPr sz="1300" b="1" i="0">
                 <a:solidFill>
                   <a:srgbClr val="FFFFFF"/>
                 </a:solidFill>
-                <a:latin typeface="맑은 고딕"/>
+                <a:latin typeface="NanumBarunGothic"/>
               </a:rPr>
               <a:t>🧊 냉장고 관리 화면</a:t>
             </a:r>
@@ -8003,8 +8096,8 @@
         </p:nvSpPr>
         <p:spPr>
           <a:xfrm>
-            <a:off x="4114800" y="1828800"/>
-            <a:ext cx="731520" cy="347472"/>
+            <a:off x="4206239" y="1691640"/>
+            <a:ext cx="914400" cy="320040"/>
           </a:xfrm>
           <a:prstGeom prst="rect">
             <a:avLst/>
@@ -8019,11 +8112,11 @@
           <a:p>
             <a:pPr algn="l"/>
             <a:r>
-              <a:rPr sz="1400" b="1">
+              <a:rPr sz="1300" b="1" i="0">
                 <a:solidFill>
                   <a:srgbClr val="22C55E"/>
                 </a:solidFill>
-                <a:latin typeface="맑은 고딕"/>
+                <a:latin typeface="NanumBarunGothic"/>
               </a:rPr>
               <a:t>95%</a:t>
             </a:r>
@@ -8038,8 +8131,8 @@
         </p:nvSpPr>
         <p:spPr>
           <a:xfrm>
-            <a:off x="365760" y="2212848"/>
-            <a:ext cx="5029200" cy="164592"/>
+            <a:off x="457200" y="2039112"/>
+            <a:ext cx="5029200" cy="137160"/>
           </a:xfrm>
           <a:prstGeom prst="rect">
             <a:avLst/>
@@ -8081,8 +8174,8 @@
         </p:nvSpPr>
         <p:spPr>
           <a:xfrm>
-            <a:off x="365760" y="2212848"/>
-            <a:ext cx="4777740" cy="164592"/>
+            <a:off x="457200" y="2039112"/>
+            <a:ext cx="4777740" cy="137160"/>
           </a:xfrm>
           <a:prstGeom prst="rect">
             <a:avLst/>
@@ -8124,8 +8217,8 @@
         </p:nvSpPr>
         <p:spPr>
           <a:xfrm>
-            <a:off x="365760" y="2724912"/>
-            <a:ext cx="3657600" cy="347472"/>
+            <a:off x="457200" y="2606040"/>
+            <a:ext cx="3657600" cy="320040"/>
           </a:xfrm>
           <a:prstGeom prst="rect">
             <a:avLst/>
@@ -8140,11 +8233,11 @@
           <a:p>
             <a:pPr algn="l"/>
             <a:r>
-              <a:rPr sz="1400" b="1">
+              <a:rPr sz="1300" b="1" i="0">
                 <a:solidFill>
                   <a:srgbClr val="FFFFFF"/>
                 </a:solidFill>
-                <a:latin typeface="맑은 고딕"/>
+                <a:latin typeface="NanumBarunGothic"/>
               </a:rPr>
               <a:t>🍳 레시피 추천 기능</a:t>
             </a:r>
@@ -8159,8 +8252,8 @@
         </p:nvSpPr>
         <p:spPr>
           <a:xfrm>
-            <a:off x="4114800" y="2724912"/>
-            <a:ext cx="731520" cy="347472"/>
+            <a:off x="4206239" y="2606040"/>
+            <a:ext cx="914400" cy="320040"/>
           </a:xfrm>
           <a:prstGeom prst="rect">
             <a:avLst/>
@@ -8175,11 +8268,11 @@
           <a:p>
             <a:pPr algn="l"/>
             <a:r>
-              <a:rPr sz="1400" b="1">
+              <a:rPr sz="1300" b="1" i="0">
                 <a:solidFill>
                   <a:srgbClr val="22C55E"/>
                 </a:solidFill>
-                <a:latin typeface="맑은 고딕"/>
+                <a:latin typeface="NanumBarunGothic"/>
               </a:rPr>
               <a:t>90%</a:t>
             </a:r>
@@ -8194,8 +8287,8 @@
         </p:nvSpPr>
         <p:spPr>
           <a:xfrm>
-            <a:off x="365760" y="3108960"/>
-            <a:ext cx="5029200" cy="164592"/>
+            <a:off x="457200" y="2953512"/>
+            <a:ext cx="5029200" cy="137160"/>
           </a:xfrm>
           <a:prstGeom prst="rect">
             <a:avLst/>
@@ -8237,8 +8330,8 @@
         </p:nvSpPr>
         <p:spPr>
           <a:xfrm>
-            <a:off x="365760" y="3108960"/>
-            <a:ext cx="4526280" cy="164592"/>
+            <a:off x="457200" y="2953512"/>
+            <a:ext cx="4526280" cy="137160"/>
           </a:xfrm>
           <a:prstGeom prst="rect">
             <a:avLst/>
@@ -8280,8 +8373,8 @@
         </p:nvSpPr>
         <p:spPr>
           <a:xfrm>
-            <a:off x="365760" y="3621024"/>
-            <a:ext cx="3657600" cy="347472"/>
+            <a:off x="457200" y="3520440"/>
+            <a:ext cx="3657600" cy="320040"/>
           </a:xfrm>
           <a:prstGeom prst="rect">
             <a:avLst/>
@@ -8296,11 +8389,11 @@
           <a:p>
             <a:pPr algn="l"/>
             <a:r>
-              <a:rPr sz="1400" b="1">
+              <a:rPr sz="1300" b="1" i="0">
                 <a:solidFill>
                   <a:srgbClr val="FFFFFF"/>
                 </a:solidFill>
-                <a:latin typeface="맑은 고딕"/>
+                <a:latin typeface="NanumBarunGothic"/>
               </a:rPr>
               <a:t>👤 프로필 / 로그인</a:t>
             </a:r>
@@ -8315,8 +8408,8 @@
         </p:nvSpPr>
         <p:spPr>
           <a:xfrm>
-            <a:off x="4114800" y="3621024"/>
-            <a:ext cx="731520" cy="347472"/>
+            <a:off x="4206239" y="3520440"/>
+            <a:ext cx="914400" cy="320040"/>
           </a:xfrm>
           <a:prstGeom prst="rect">
             <a:avLst/>
@@ -8331,11 +8424,11 @@
           <a:p>
             <a:pPr algn="l"/>
             <a:r>
-              <a:rPr sz="1400" b="1">
+              <a:rPr sz="1300" b="1" i="0">
                 <a:solidFill>
                   <a:srgbClr val="22C55E"/>
                 </a:solidFill>
-                <a:latin typeface="맑은 고딕"/>
+                <a:latin typeface="NanumBarunGothic"/>
               </a:rPr>
               <a:t>95%</a:t>
             </a:r>
@@ -8350,8 +8443,8 @@
         </p:nvSpPr>
         <p:spPr>
           <a:xfrm>
-            <a:off x="365760" y="4005072"/>
-            <a:ext cx="5029200" cy="164592"/>
+            <a:off x="457200" y="3867912"/>
+            <a:ext cx="5029200" cy="137160"/>
           </a:xfrm>
           <a:prstGeom prst="rect">
             <a:avLst/>
@@ -8393,8 +8486,8 @@
         </p:nvSpPr>
         <p:spPr>
           <a:xfrm>
-            <a:off x="365760" y="4005072"/>
-            <a:ext cx="4777740" cy="164592"/>
+            <a:off x="457200" y="3867912"/>
+            <a:ext cx="4777740" cy="137160"/>
           </a:xfrm>
           <a:prstGeom prst="rect">
             <a:avLst/>
@@ -8436,8 +8529,8 @@
         </p:nvSpPr>
         <p:spPr>
           <a:xfrm>
-            <a:off x="365760" y="4517136"/>
-            <a:ext cx="3657600" cy="347472"/>
+            <a:off x="457200" y="4434840"/>
+            <a:ext cx="3657600" cy="320040"/>
           </a:xfrm>
           <a:prstGeom prst="rect">
             <a:avLst/>
@@ -8452,11 +8545,11 @@
           <a:p>
             <a:pPr algn="l"/>
             <a:r>
-              <a:rPr sz="1400" b="1">
+              <a:rPr sz="1300" b="1" i="0">
                 <a:solidFill>
                   <a:srgbClr val="FFFFFF"/>
                 </a:solidFill>
-                <a:latin typeface="맑은 고딕"/>
+                <a:latin typeface="NanumBarunGothic"/>
               </a:rPr>
               <a:t>📸 카메라 인식 기능</a:t>
             </a:r>
@@ -8471,8 +8564,8 @@
         </p:nvSpPr>
         <p:spPr>
           <a:xfrm>
-            <a:off x="4114800" y="4517136"/>
-            <a:ext cx="731520" cy="347472"/>
+            <a:off x="4206239" y="4434840"/>
+            <a:ext cx="914400" cy="320040"/>
           </a:xfrm>
           <a:prstGeom prst="rect">
             <a:avLst/>
@@ -8487,11 +8580,11 @@
           <a:p>
             <a:pPr algn="l"/>
             <a:r>
-              <a:rPr sz="1400" b="1">
+              <a:rPr sz="1300" b="1" i="0">
                 <a:solidFill>
                   <a:srgbClr val="22C55E"/>
                 </a:solidFill>
-                <a:latin typeface="맑은 고딕"/>
+                <a:latin typeface="NanumBarunGothic"/>
               </a:rPr>
               <a:t>85%</a:t>
             </a:r>
@@ -8506,8 +8599,8 @@
         </p:nvSpPr>
         <p:spPr>
           <a:xfrm>
-            <a:off x="365760" y="4901184"/>
-            <a:ext cx="5029200" cy="164592"/>
+            <a:off x="457200" y="4782312"/>
+            <a:ext cx="5029200" cy="137160"/>
           </a:xfrm>
           <a:prstGeom prst="rect">
             <a:avLst/>
@@ -8549,8 +8642,8 @@
         </p:nvSpPr>
         <p:spPr>
           <a:xfrm>
-            <a:off x="365760" y="4901184"/>
-            <a:ext cx="4274820" cy="164592"/>
+            <a:off x="457200" y="4782312"/>
+            <a:ext cx="4274820" cy="137160"/>
           </a:xfrm>
           <a:prstGeom prst="rect">
             <a:avLst/>
@@ -8592,8 +8685,8 @@
         </p:nvSpPr>
         <p:spPr>
           <a:xfrm>
-            <a:off x="365760" y="5413248"/>
-            <a:ext cx="3657600" cy="347472"/>
+            <a:off x="457200" y="5349240"/>
+            <a:ext cx="3657600" cy="320040"/>
           </a:xfrm>
           <a:prstGeom prst="rect">
             <a:avLst/>
@@ -8608,11 +8701,11 @@
           <a:p>
             <a:pPr algn="l"/>
             <a:r>
-              <a:rPr sz="1400" b="1">
+              <a:rPr sz="1300" b="1" i="0">
                 <a:solidFill>
                   <a:srgbClr val="FFFFFF"/>
                 </a:solidFill>
-                <a:latin typeface="맑은 고딕"/>
+                <a:latin typeface="NanumBarunGothic"/>
               </a:rPr>
               <a:t>🤖 모델 인식 정확도</a:t>
             </a:r>
@@ -8627,8 +8720,8 @@
         </p:nvSpPr>
         <p:spPr>
           <a:xfrm>
-            <a:off x="4114800" y="5413248"/>
-            <a:ext cx="731520" cy="347472"/>
+            <a:off x="4206239" y="5349240"/>
+            <a:ext cx="914400" cy="320040"/>
           </a:xfrm>
           <a:prstGeom prst="rect">
             <a:avLst/>
@@ -8643,11 +8736,11 @@
           <a:p>
             <a:pPr algn="l"/>
             <a:r>
-              <a:rPr sz="1400" b="1">
+              <a:rPr sz="1300" b="1" i="0">
                 <a:solidFill>
                   <a:srgbClr val="F59E0B"/>
                 </a:solidFill>
-                <a:latin typeface="맑은 고딕"/>
+                <a:latin typeface="NanumBarunGothic"/>
               </a:rPr>
               <a:t>70%</a:t>
             </a:r>
@@ -8662,8 +8755,8 @@
         </p:nvSpPr>
         <p:spPr>
           <a:xfrm>
-            <a:off x="365760" y="5797296"/>
-            <a:ext cx="5029200" cy="164592"/>
+            <a:off x="457200" y="5696712"/>
+            <a:ext cx="5029200" cy="137160"/>
           </a:xfrm>
           <a:prstGeom prst="rect">
             <a:avLst/>
@@ -8705,8 +8798,8 @@
         </p:nvSpPr>
         <p:spPr>
           <a:xfrm>
-            <a:off x="365760" y="5797296"/>
-            <a:ext cx="3520440" cy="164592"/>
+            <a:off x="457200" y="5696712"/>
+            <a:ext cx="3520440" cy="137160"/>
           </a:xfrm>
           <a:prstGeom prst="rect">
             <a:avLst/>
@@ -8748,8 +8841,8 @@
         </p:nvSpPr>
         <p:spPr>
           <a:xfrm>
-            <a:off x="365760" y="5577840"/>
-            <a:ext cx="5120640" cy="685800"/>
+            <a:off x="457200" y="6400800"/>
+            <a:ext cx="5212080" cy="292608"/>
           </a:xfrm>
           <a:prstGeom prst="rect">
             <a:avLst/>
@@ -8793,8 +8886,8 @@
         </p:nvSpPr>
         <p:spPr>
           <a:xfrm>
-            <a:off x="548640" y="5650992"/>
-            <a:ext cx="4754880" cy="502920"/>
+            <a:off x="640080" y="6428232"/>
+            <a:ext cx="4846320" cy="274320"/>
           </a:xfrm>
           <a:prstGeom prst="rect">
             <a:avLst/>
@@ -8809,11 +8902,11 @@
           <a:p>
             <a:pPr algn="l"/>
             <a:r>
-              <a:rPr sz="1800" b="1">
+              <a:rPr sz="1400" b="1" i="0">
                 <a:solidFill>
                   <a:srgbClr val="22C55E"/>
                 </a:solidFill>
-                <a:latin typeface="맑은 고딕"/>
+                <a:latin typeface="NanumBarunGothic"/>
               </a:rPr>
               <a:t>전체 완성도  87%</a:t>
             </a:r>
@@ -8828,8 +8921,8 @@
         </p:nvSpPr>
         <p:spPr>
           <a:xfrm>
-            <a:off x="5943600" y="1828800"/>
-            <a:ext cx="2743200" cy="1920240"/>
+            <a:off x="6035040" y="1691640"/>
+            <a:ext cx="2788920" cy="2148840"/>
           </a:xfrm>
           <a:prstGeom prst="rect">
             <a:avLst/>
@@ -8873,8 +8966,8 @@
         </p:nvSpPr>
         <p:spPr>
           <a:xfrm>
-            <a:off x="6126480" y="2148840"/>
-            <a:ext cx="2468880" cy="822960"/>
+            <a:off x="6035040" y="2148840"/>
+            <a:ext cx="2788920" cy="822960"/>
           </a:xfrm>
           <a:prstGeom prst="rect">
             <a:avLst/>
@@ -8889,11 +8982,11 @@
           <a:p>
             <a:pPr algn="ctr"/>
             <a:r>
-              <a:rPr sz="3400" b="1">
+              <a:rPr sz="3000" b="1" i="0">
                 <a:solidFill>
                   <a:srgbClr val="22C55E"/>
                 </a:solidFill>
-                <a:latin typeface="맑은 고딕"/>
+                <a:latin typeface="NanumBarunGothic"/>
               </a:rPr>
               <a:t>36종</a:t>
             </a:r>
@@ -8908,8 +9001,8 @@
         </p:nvSpPr>
         <p:spPr>
           <a:xfrm>
-            <a:off x="6126480" y="3063240"/>
-            <a:ext cx="2468880" cy="365760"/>
+            <a:off x="6035040" y="3108960"/>
+            <a:ext cx="2788920" cy="365760"/>
           </a:xfrm>
           <a:prstGeom prst="rect">
             <a:avLst/>
@@ -8924,11 +9017,11 @@
           <a:p>
             <a:pPr algn="ctr"/>
             <a:r>
-              <a:rPr sz="1200" b="0">
+              <a:rPr sz="1200" b="0" i="0">
                 <a:solidFill>
                   <a:srgbClr val="94A3B8"/>
                 </a:solidFill>
-                <a:latin typeface="맑은 고딕"/>
+                <a:latin typeface="NanumBarunGothic"/>
               </a:rPr>
               <a:t>인식 가능 식재료</a:t>
             </a:r>
@@ -8943,8 +9036,8 @@
         </p:nvSpPr>
         <p:spPr>
           <a:xfrm>
-            <a:off x="8961120" y="1828800"/>
-            <a:ext cx="2743200" cy="1920240"/>
+            <a:off x="9052559" y="1691640"/>
+            <a:ext cx="2788920" cy="2148840"/>
           </a:xfrm>
           <a:prstGeom prst="rect">
             <a:avLst/>
@@ -8988,8 +9081,8 @@
         </p:nvSpPr>
         <p:spPr>
           <a:xfrm>
-            <a:off x="9144000" y="2148840"/>
-            <a:ext cx="2468880" cy="822960"/>
+            <a:off x="9052559" y="2148840"/>
+            <a:ext cx="2788920" cy="822960"/>
           </a:xfrm>
           <a:prstGeom prst="rect">
             <a:avLst/>
@@ -9004,13 +9097,13 @@
           <a:p>
             <a:pPr algn="ctr"/>
             <a:r>
-              <a:rPr sz="3400" b="1">
+              <a:rPr sz="3000" b="1" i="0">
                 <a:solidFill>
                   <a:srgbClr val="22C55E"/>
                 </a:solidFill>
-                <a:latin typeface="맑은 고딕"/>
-              </a:rPr>
-              <a:t>2.7MB</a:t>
+                <a:latin typeface="NanumBarunGothic"/>
+              </a:rPr>
+              <a:t>2.7 MB</a:t>
             </a:r>
           </a:p>
         </p:txBody>
@@ -9023,8 +9116,8 @@
         </p:nvSpPr>
         <p:spPr>
           <a:xfrm>
-            <a:off x="9144000" y="3063240"/>
-            <a:ext cx="2468880" cy="365760"/>
+            <a:off x="9052559" y="3108960"/>
+            <a:ext cx="2788920" cy="365760"/>
           </a:xfrm>
           <a:prstGeom prst="rect">
             <a:avLst/>
@@ -9039,11 +9132,11 @@
           <a:p>
             <a:pPr algn="ctr"/>
             <a:r>
-              <a:rPr sz="1200" b="0">
+              <a:rPr sz="1200" b="0" i="0">
                 <a:solidFill>
                   <a:srgbClr val="94A3B8"/>
                 </a:solidFill>
-                <a:latin typeface="맑은 고딕"/>
+                <a:latin typeface="NanumBarunGothic"/>
               </a:rPr>
               <a:t>TFLite 모델 크기</a:t>
             </a:r>
@@ -9058,8 +9151,8 @@
         </p:nvSpPr>
         <p:spPr>
           <a:xfrm>
-            <a:off x="5943600" y="4114800"/>
-            <a:ext cx="2743200" cy="1920240"/>
+            <a:off x="6035040" y="4114800"/>
+            <a:ext cx="2788920" cy="2148840"/>
           </a:xfrm>
           <a:prstGeom prst="rect">
             <a:avLst/>
@@ -9103,8 +9196,8 @@
         </p:nvSpPr>
         <p:spPr>
           <a:xfrm>
-            <a:off x="6126480" y="4434840"/>
-            <a:ext cx="2468880" cy="822960"/>
+            <a:off x="6035040" y="4572000"/>
+            <a:ext cx="2788920" cy="822960"/>
           </a:xfrm>
           <a:prstGeom prst="rect">
             <a:avLst/>
@@ -9119,11 +9212,11 @@
           <a:p>
             <a:pPr algn="ctr"/>
             <a:r>
-              <a:rPr sz="3400" b="1">
+              <a:rPr sz="3000" b="1" i="0">
                 <a:solidFill>
                   <a:srgbClr val="22C55E"/>
                 </a:solidFill>
-                <a:latin typeface="맑은 고딕"/>
+                <a:latin typeface="NanumBarunGothic"/>
               </a:rPr>
               <a:t>3,115장</a:t>
             </a:r>
@@ -9138,8 +9231,8 @@
         </p:nvSpPr>
         <p:spPr>
           <a:xfrm>
-            <a:off x="6126480" y="5349240"/>
-            <a:ext cx="2468880" cy="365760"/>
+            <a:off x="6035040" y="5532120"/>
+            <a:ext cx="2788920" cy="365760"/>
           </a:xfrm>
           <a:prstGeom prst="rect">
             <a:avLst/>
@@ -9154,11 +9247,11 @@
           <a:p>
             <a:pPr algn="ctr"/>
             <a:r>
-              <a:rPr sz="1200" b="0">
+              <a:rPr sz="1200" b="0" i="0">
                 <a:solidFill>
                   <a:srgbClr val="94A3B8"/>
                 </a:solidFill>
-                <a:latin typeface="맑은 고딕"/>
+                <a:latin typeface="NanumBarunGothic"/>
               </a:rPr>
               <a:t>학습 데이터</a:t>
             </a:r>
@@ -9173,8 +9266,8 @@
         </p:nvSpPr>
         <p:spPr>
           <a:xfrm>
-            <a:off x="8961120" y="4114800"/>
-            <a:ext cx="2743200" cy="1920240"/>
+            <a:off x="9052559" y="4114800"/>
+            <a:ext cx="2788920" cy="2148840"/>
           </a:xfrm>
           <a:prstGeom prst="rect">
             <a:avLst/>
@@ -9218,8 +9311,8 @@
         </p:nvSpPr>
         <p:spPr>
           <a:xfrm>
-            <a:off x="9144000" y="4434840"/>
-            <a:ext cx="2468880" cy="822960"/>
+            <a:off x="9052559" y="4572000"/>
+            <a:ext cx="2788920" cy="822960"/>
           </a:xfrm>
           <a:prstGeom prst="rect">
             <a:avLst/>
@@ -9234,11 +9327,11 @@
           <a:p>
             <a:pPr algn="ctr"/>
             <a:r>
-              <a:rPr sz="3400" b="1">
+              <a:rPr sz="3000" b="1" i="0">
                 <a:solidFill>
                   <a:srgbClr val="22C55E"/>
                 </a:solidFill>
-                <a:latin typeface="맑은 고딕"/>
+                <a:latin typeface="NanumBarunGothic"/>
               </a:rPr>
               <a:t>&lt;1초</a:t>
             </a:r>
@@ -9253,8 +9346,8 @@
         </p:nvSpPr>
         <p:spPr>
           <a:xfrm>
-            <a:off x="9144000" y="5349240"/>
-            <a:ext cx="2468880" cy="365760"/>
+            <a:off x="9052559" y="5532120"/>
+            <a:ext cx="2788920" cy="365760"/>
           </a:xfrm>
           <a:prstGeom prst="rect">
             <a:avLst/>
@@ -9269,11 +9362,11 @@
           <a:p>
             <a:pPr algn="ctr"/>
             <a:r>
-              <a:rPr sz="1200" b="0">
+              <a:rPr sz="1200" b="0" i="0">
                 <a:solidFill>
                   <a:srgbClr val="94A3B8"/>
                 </a:solidFill>
-                <a:latin typeface="맑은 고딕"/>
+                <a:latin typeface="NanumBarunGothic"/>
               </a:rPr>
               <a:t>추론 속도</a:t>
             </a:r>
@@ -9288,27 +9381,27 @@
         </p:nvSpPr>
         <p:spPr>
           <a:xfrm>
-            <a:off x="11430000" y="6492240"/>
-            <a:ext cx="731520" cy="274320"/>
-          </a:xfrm>
-          <a:prstGeom prst="rect">
-            <a:avLst/>
-          </a:prstGeom>
-          <a:noFill/>
-        </p:spPr>
-        <p:txBody>
-          <a:bodyPr wrap="square">
-            <a:spAutoFit/>
-          </a:bodyPr>
-          <a:lstStyle/>
-          <a:p>
-            <a:pPr algn="l"/>
-            <a:r>
-              <a:rPr sz="1100" b="0">
+            <a:off x="11247120" y="6492240"/>
+            <a:ext cx="914400" cy="274320"/>
+          </a:xfrm>
+          <a:prstGeom prst="rect">
+            <a:avLst/>
+          </a:prstGeom>
+          <a:noFill/>
+        </p:spPr>
+        <p:txBody>
+          <a:bodyPr wrap="square">
+            <a:spAutoFit/>
+          </a:bodyPr>
+          <a:lstStyle/>
+          <a:p>
+            <a:pPr algn="r"/>
+            <a:r>
+              <a:rPr sz="1100" b="0" i="0">
                 <a:solidFill>
                   <a:srgbClr val="334155"/>
                 </a:solidFill>
-                <a:latin typeface="맑은 고딕"/>
+                <a:latin typeface="NanumBarunGothic"/>
               </a:rPr>
               <a:t>07 / 09</a:t>
             </a:r>
@@ -9385,7 +9478,7 @@
         <p:spPr>
           <a:xfrm>
             <a:off x="0" y="0"/>
-            <a:ext cx="73152" cy="6858000"/>
+            <a:ext cx="91440" cy="6858000"/>
           </a:xfrm>
           <a:prstGeom prst="rect">
             <a:avLst/>
@@ -9427,8 +9520,8 @@
         </p:nvSpPr>
         <p:spPr>
           <a:xfrm>
-            <a:off x="365760" y="457200"/>
-            <a:ext cx="3200400" cy="320040"/>
+            <a:off x="457200" y="411480"/>
+            <a:ext cx="3657600" cy="320040"/>
           </a:xfrm>
           <a:prstGeom prst="rect">
             <a:avLst/>
@@ -9443,11 +9536,11 @@
           <a:p>
             <a:pPr algn="l"/>
             <a:r>
-              <a:rPr sz="1100" b="1">
+              <a:rPr sz="1000" b="1" i="0">
                 <a:solidFill>
                   <a:srgbClr val="22C55E"/>
                 </a:solidFill>
-                <a:latin typeface="맑은 고딕"/>
+                <a:latin typeface="NanumBarunGothic"/>
               </a:rPr>
               <a:t>이슈 / 개선</a:t>
             </a:r>
@@ -9462,8 +9555,8 @@
         </p:nvSpPr>
         <p:spPr>
           <a:xfrm>
-            <a:off x="365760" y="822960"/>
-            <a:ext cx="7315200" cy="685800"/>
+            <a:off x="457200" y="731520"/>
+            <a:ext cx="7772400" cy="822960"/>
           </a:xfrm>
           <a:prstGeom prst="rect">
             <a:avLst/>
@@ -9478,11 +9571,11 @@
           <a:p>
             <a:pPr algn="l"/>
             <a:r>
-              <a:rPr sz="3600" b="1">
+              <a:rPr sz="3800" b="1" i="0">
                 <a:solidFill>
                   <a:srgbClr val="FFFFFF"/>
                 </a:solidFill>
-                <a:latin typeface="맑은 고딕"/>
+                <a:latin typeface="NanumBarunGothic"/>
               </a:rPr>
               <a:t>향후 과제 및 이슈</a:t>
             </a:r>
@@ -9497,14 +9590,14 @@
         </p:nvSpPr>
         <p:spPr>
           <a:xfrm>
-            <a:off x="365760" y="1691640"/>
-            <a:ext cx="5394960" cy="2926080"/>
+            <a:off x="457200" y="1737360"/>
+            <a:ext cx="5394960" cy="3108960"/>
           </a:xfrm>
           <a:prstGeom prst="rect">
             <a:avLst/>
           </a:prstGeom>
           <a:solidFill>
-            <a:srgbClr val="180A0A"/>
+            <a:srgbClr val="180808"/>
           </a:solidFill>
           <a:ln w="12700">
             <a:solidFill>
@@ -9542,8 +9635,8 @@
         </p:nvSpPr>
         <p:spPr>
           <a:xfrm>
-            <a:off x="548640" y="1810512"/>
-            <a:ext cx="2743200" cy="347472"/>
+            <a:off x="685800" y="1874519"/>
+            <a:ext cx="2743200" cy="365760"/>
           </a:xfrm>
           <a:prstGeom prst="rect">
             <a:avLst/>
@@ -9558,11 +9651,11 @@
           <a:p>
             <a:pPr algn="l"/>
             <a:r>
-              <a:rPr sz="1300" b="1">
+              <a:rPr sz="1300" b="1" i="0">
                 <a:solidFill>
                   <a:srgbClr val="FCA5A5"/>
                 </a:solidFill>
-                <a:latin typeface="맑은 고딕"/>
+                <a:latin typeface="NanumBarunGothic"/>
               </a:rPr>
               <a:t>⚠️ 현재 이슈</a:t>
             </a:r>
@@ -9577,8 +9670,8 @@
         </p:nvSpPr>
         <p:spPr>
           <a:xfrm>
-            <a:off x="548640" y="2240280"/>
-            <a:ext cx="5029200" cy="594360"/>
+            <a:off x="685800" y="2359152"/>
+            <a:ext cx="4937760" cy="640080"/>
           </a:xfrm>
           <a:prstGeom prst="rect">
             <a:avLst/>
@@ -9593,13 +9686,13 @@
           <a:p>
             <a:pPr algn="l"/>
             <a:r>
-              <a:rPr sz="1200" b="0">
+              <a:rPr sz="1200" b="0" i="0">
                 <a:solidFill>
                   <a:srgbClr val="FBCACA"/>
                 </a:solidFill>
-                <a:latin typeface="맑은 고딕"/>
-              </a:rPr>
-              <a:t>• 오인식: 복숭아→감자(56%), 가지→오이 오분류</a:t>
+                <a:latin typeface="NanumBarunGothic"/>
+              </a:rPr>
+              <a:t>• 오인식: 복숭아→감자(56%), 가지→오이 발생</a:t>
             </a:r>
           </a:p>
         </p:txBody>
@@ -9612,8 +9705,8 @@
         </p:nvSpPr>
         <p:spPr>
           <a:xfrm>
-            <a:off x="548640" y="2898648"/>
-            <a:ext cx="5029200" cy="594360"/>
+            <a:off x="685800" y="3108960"/>
+            <a:ext cx="4937760" cy="640080"/>
           </a:xfrm>
           <a:prstGeom prst="rect">
             <a:avLst/>
@@ -9628,13 +9721,13 @@
           <a:p>
             <a:pPr algn="l"/>
             <a:r>
-              <a:rPr sz="1200" b="0">
+              <a:rPr sz="1200" b="0" i="0">
                 <a:solidFill>
                   <a:srgbClr val="FBCACA"/>
                 </a:solidFill>
-                <a:latin typeface="맑은 고딕"/>
-              </a:rPr>
-              <a:t>• 도메인 불일치: 해외 데이터 vs 한국 실환경 차이</a:t>
+                <a:latin typeface="NanumBarunGothic"/>
+              </a:rPr>
+              <a:t>• 도메인 불일치: 해외 데이터 vs 한국 실환경</a:t>
             </a:r>
           </a:p>
         </p:txBody>
@@ -9647,8 +9740,8 @@
         </p:nvSpPr>
         <p:spPr>
           <a:xfrm>
-            <a:off x="548640" y="3557016"/>
-            <a:ext cx="5029200" cy="594360"/>
+            <a:off x="685800" y="3858768"/>
+            <a:ext cx="4937760" cy="640080"/>
           </a:xfrm>
           <a:prstGeom prst="rect">
             <a:avLst/>
@@ -9663,13 +9756,13 @@
           <a:p>
             <a:pPr algn="l"/>
             <a:r>
-              <a:rPr sz="1200" b="0">
+              <a:rPr sz="1200" b="0" i="0">
                 <a:solidFill>
                   <a:srgbClr val="FBCACA"/>
                 </a:solidFill>
-                <a:latin typeface="맑은 고딕"/>
-              </a:rPr>
-              <a:t>• 품종 미지원: 백도, 청양고추 등 한국 특화 미인식</a:t>
+                <a:latin typeface="NanumBarunGothic"/>
+              </a:rPr>
+              <a:t>• 품종 미지원: 백도·청양고추 등 한국 특화 품종</a:t>
             </a:r>
           </a:p>
         </p:txBody>
@@ -9682,14 +9775,14 @@
         </p:nvSpPr>
         <p:spPr>
           <a:xfrm>
-            <a:off x="6217920" y="1691640"/>
-            <a:ext cx="5577840" cy="2926080"/>
+            <a:off x="6309360" y="1737360"/>
+            <a:ext cx="5486400" cy="3108960"/>
           </a:xfrm>
           <a:prstGeom prst="rect">
             <a:avLst/>
           </a:prstGeom>
           <a:solidFill>
-            <a:srgbClr val="0A180F"/>
+            <a:srgbClr val="08180E"/>
           </a:solidFill>
           <a:ln w="12700">
             <a:solidFill>
@@ -9727,8 +9820,8 @@
         </p:nvSpPr>
         <p:spPr>
           <a:xfrm>
-            <a:off x="6400800" y="1810512"/>
-            <a:ext cx="2743200" cy="347472"/>
+            <a:off x="6537960" y="1874519"/>
+            <a:ext cx="2743200" cy="365760"/>
           </a:xfrm>
           <a:prstGeom prst="rect">
             <a:avLst/>
@@ -9743,11 +9836,11 @@
           <a:p>
             <a:pPr algn="l"/>
             <a:r>
-              <a:rPr sz="1300" b="1">
+              <a:rPr sz="1300" b="1" i="0">
                 <a:solidFill>
                   <a:srgbClr val="22C55E"/>
                 </a:solidFill>
-                <a:latin typeface="맑은 고딕"/>
+                <a:latin typeface="NanumBarunGothic"/>
               </a:rPr>
               <a:t>✅ 대응 방안</a:t>
             </a:r>
@@ -9762,8 +9855,8 @@
         </p:nvSpPr>
         <p:spPr>
           <a:xfrm>
-            <a:off x="6400800" y="2240280"/>
-            <a:ext cx="5212080" cy="594360"/>
+            <a:off x="6537960" y="2359152"/>
+            <a:ext cx="5029200" cy="594360"/>
           </a:xfrm>
           <a:prstGeom prst="rect">
             <a:avLst/>
@@ -9778,11 +9871,11 @@
           <a:p>
             <a:pPr algn="l"/>
             <a:r>
-              <a:rPr sz="1200" b="0">
+              <a:rPr sz="1200" b="0" i="0">
                 <a:solidFill>
                   <a:srgbClr val="86EFAC"/>
                 </a:solidFill>
-                <a:latin typeface="맑은 고딕"/>
+                <a:latin typeface="NanumBarunGothic"/>
               </a:rPr>
               <a:t>• 1.6TB 한국 식재료 데이터셋으로 재학습 예정</a:t>
             </a:r>
@@ -9797,8 +9890,8 @@
         </p:nvSpPr>
         <p:spPr>
           <a:xfrm>
-            <a:off x="6400800" y="2898648"/>
-            <a:ext cx="5212080" cy="594360"/>
+            <a:off x="6537960" y="3017520"/>
+            <a:ext cx="5029200" cy="594360"/>
           </a:xfrm>
           <a:prstGeom prst="rect">
             <a:avLst/>
@@ -9813,13 +9906,13 @@
           <a:p>
             <a:pPr algn="l"/>
             <a:r>
-              <a:rPr sz="1200" b="0">
+              <a:rPr sz="1200" b="0" i="0">
                 <a:solidFill>
                   <a:srgbClr val="86EFAC"/>
                 </a:solidFill>
-                <a:latin typeface="맑은 고딕"/>
-              </a:rPr>
-              <a:t>• RTX 5080 로컬 PC + CUDA 12.8 학습 환경 구성</a:t>
+                <a:latin typeface="NanumBarunGothic"/>
+              </a:rPr>
+              <a:t>• RTX 5080 로컬 PC + CUDA 12.8 환경 구성</a:t>
             </a:r>
           </a:p>
         </p:txBody>
@@ -9832,8 +9925,8 @@
         </p:nvSpPr>
         <p:spPr>
           <a:xfrm>
-            <a:off x="6400800" y="3557016"/>
-            <a:ext cx="5212080" cy="594360"/>
+            <a:off x="6537960" y="3675887"/>
+            <a:ext cx="5029200" cy="594360"/>
           </a:xfrm>
           <a:prstGeom prst="rect">
             <a:avLst/>
@@ -9848,13 +9941,13 @@
           <a:p>
             <a:pPr algn="l"/>
             <a:r>
-              <a:rPr sz="1200" b="0">
+              <a:rPr sz="1200" b="0" i="0">
                 <a:solidFill>
                   <a:srgbClr val="86EFAC"/>
                 </a:solidFill>
-                <a:latin typeface="맑은 고딕"/>
-              </a:rPr>
-              <a:t>• 쌀 품종 등 한국 특화 100+ 클래스로 확장</a:t>
+                <a:latin typeface="NanumBarunGothic"/>
+              </a:rPr>
+              <a:t>• 쌀 품종 등 한국 특화 100+ 클래스 확장</a:t>
             </a:r>
           </a:p>
         </p:txBody>
@@ -9867,8 +9960,8 @@
         </p:nvSpPr>
         <p:spPr>
           <a:xfrm>
-            <a:off x="6400800" y="4215384"/>
-            <a:ext cx="5212080" cy="594360"/>
+            <a:off x="6537960" y="4334256"/>
+            <a:ext cx="5029200" cy="594360"/>
           </a:xfrm>
           <a:prstGeom prst="rect">
             <a:avLst/>
@@ -9883,11 +9976,11 @@
           <a:p>
             <a:pPr algn="l"/>
             <a:r>
-              <a:rPr sz="1200" b="0">
+              <a:rPr sz="1200" b="0" i="0">
                 <a:solidFill>
                   <a:srgbClr val="86EFAC"/>
                 </a:solidFill>
-                <a:latin typeface="맑은 고딕"/>
+                <a:latin typeface="NanumBarunGothic"/>
               </a:rPr>
               <a:t>• 신뢰도 낮을 때 수동 입력 유도 UX 추가</a:t>
             </a:r>
@@ -9910,8 +10003,8 @@
         </p:blipFill>
         <p:spPr>
           <a:xfrm>
-            <a:off x="457200" y="4754880"/>
-            <a:ext cx="1645920" cy="2926080"/>
+            <a:off x="457200" y="5074920"/>
+            <a:ext cx="1691640" cy="3017520"/>
           </a:xfrm>
           <a:prstGeom prst="rect">
             <a:avLst/>
@@ -9926,8 +10019,8 @@
         </p:nvSpPr>
         <p:spPr>
           <a:xfrm>
-            <a:off x="2377440" y="4754880"/>
-            <a:ext cx="4114800" cy="868680"/>
+            <a:off x="2423160" y="5120640"/>
+            <a:ext cx="4206240" cy="868680"/>
           </a:xfrm>
           <a:prstGeom prst="rect">
             <a:avLst/>
@@ -9971,7 +10064,7 @@
         </p:nvSpPr>
         <p:spPr>
           <a:xfrm>
-            <a:off x="2560320" y="4892040"/>
+            <a:off x="2606040" y="5257800"/>
             <a:ext cx="3840480" cy="594360"/>
           </a:xfrm>
           <a:prstGeom prst="rect">
@@ -9987,13 +10080,13 @@
           <a:p>
             <a:pPr algn="l"/>
             <a:r>
-              <a:rPr sz="1200" b="0">
+              <a:rPr sz="1200" b="0" i="0">
                 <a:solidFill>
                   <a:srgbClr val="94A3B8"/>
                 </a:solidFill>
-                <a:latin typeface="맑은 고딕"/>
-              </a:rPr>
-              <a:t>단기: 한국 데이터 서브샘플링 → Kaggle 재학습 → 정확도 85%+ 달성</a:t>
+                <a:latin typeface="NanumBarunGothic"/>
+              </a:rPr>
+              <a:t>단기: 한국 데이터 재학습 → 정확도 85%+ 달성</a:t>
             </a:r>
           </a:p>
         </p:txBody>
@@ -10006,8 +10099,8 @@
         </p:nvSpPr>
         <p:spPr>
           <a:xfrm>
-            <a:off x="2377440" y="5715000"/>
-            <a:ext cx="4114800" cy="868680"/>
+            <a:off x="2423160" y="6080760"/>
+            <a:ext cx="4206240" cy="640080"/>
           </a:xfrm>
           <a:prstGeom prst="rect">
             <a:avLst/>
@@ -10051,8 +10144,8 @@
         </p:nvSpPr>
         <p:spPr>
           <a:xfrm>
-            <a:off x="2560320" y="5852160"/>
-            <a:ext cx="3840480" cy="594360"/>
+            <a:off x="2606040" y="6190488"/>
+            <a:ext cx="3840480" cy="457200"/>
           </a:xfrm>
           <a:prstGeom prst="rect">
             <a:avLst/>
@@ -10067,13 +10160,13 @@
           <a:p>
             <a:pPr algn="l"/>
             <a:r>
-              <a:rPr sz="1200" b="0">
+              <a:rPr sz="1200" b="0" i="0">
                 <a:solidFill>
                   <a:srgbClr val="94A3B8"/>
                 </a:solidFill>
-                <a:latin typeface="맑은 고딕"/>
-              </a:rPr>
-              <a:t>장기: 1.6TB 전체 로컬 학습 → 한국 식문화 특화 모델 완성</a:t>
+                <a:latin typeface="NanumBarunGothic"/>
+              </a:rPr>
+              <a:t>장기: 1.6TB 전체 학습 → 한국 식문화 특화 모델 완성</a:t>
             </a:r>
           </a:p>
         </p:txBody>
@@ -10086,27 +10179,27 @@
         </p:nvSpPr>
         <p:spPr>
           <a:xfrm>
-            <a:off x="11430000" y="6492240"/>
-            <a:ext cx="731520" cy="274320"/>
-          </a:xfrm>
-          <a:prstGeom prst="rect">
-            <a:avLst/>
-          </a:prstGeom>
-          <a:noFill/>
-        </p:spPr>
-        <p:txBody>
-          <a:bodyPr wrap="square">
-            <a:spAutoFit/>
-          </a:bodyPr>
-          <a:lstStyle/>
-          <a:p>
-            <a:pPr algn="l"/>
-            <a:r>
-              <a:rPr sz="1100" b="0">
+            <a:off x="11247120" y="6492240"/>
+            <a:ext cx="914400" cy="274320"/>
+          </a:xfrm>
+          <a:prstGeom prst="rect">
+            <a:avLst/>
+          </a:prstGeom>
+          <a:noFill/>
+        </p:spPr>
+        <p:txBody>
+          <a:bodyPr wrap="square">
+            <a:spAutoFit/>
+          </a:bodyPr>
+          <a:lstStyle/>
+          <a:p>
+            <a:pPr algn="r"/>
+            <a:r>
+              <a:rPr sz="1100" b="0" i="0">
                 <a:solidFill>
                   <a:srgbClr val="334155"/>
                 </a:solidFill>
-                <a:latin typeface="맑은 고딕"/>
+                <a:latin typeface="NanumBarunGothic"/>
               </a:rPr>
               <a:t>08 / 09</a:t>
             </a:r>
@@ -10183,7 +10276,7 @@
         <p:spPr>
           <a:xfrm>
             <a:off x="0" y="0"/>
-            <a:ext cx="73152" cy="6858000"/>
+            <a:ext cx="91440" cy="6858000"/>
           </a:xfrm>
           <a:prstGeom prst="rect">
             <a:avLst/>
@@ -10225,8 +10318,8 @@
         </p:nvSpPr>
         <p:spPr>
           <a:xfrm>
-            <a:off x="1371600" y="914400"/>
-            <a:ext cx="9418320" cy="1828800"/>
+            <a:off x="457200" y="822960"/>
+            <a:ext cx="11274552" cy="1463040"/>
           </a:xfrm>
           <a:prstGeom prst="rect">
             <a:avLst/>
@@ -10241,11 +10334,11 @@
           <a:p>
             <a:pPr algn="ctr"/>
             <a:r>
-              <a:rPr sz="7200" b="1">
+              <a:rPr sz="6800" b="1" i="0">
                 <a:solidFill>
                   <a:srgbClr val="22C55E"/>
                 </a:solidFill>
-                <a:latin typeface="맑은 고딕"/>
+                <a:latin typeface="NanumBarunGothic"/>
               </a:rPr>
               <a:t>감사합니다</a:t>
             </a:r>
@@ -10260,8 +10353,8 @@
         </p:nvSpPr>
         <p:spPr>
           <a:xfrm>
-            <a:off x="1371600" y="2743200"/>
-            <a:ext cx="9418320" cy="548640"/>
+            <a:off x="457200" y="2331720"/>
+            <a:ext cx="11274552" cy="548640"/>
           </a:xfrm>
           <a:prstGeom prst="rect">
             <a:avLst/>
@@ -10276,11 +10369,11 @@
           <a:p>
             <a:pPr algn="ctr"/>
             <a:r>
-              <a:rPr sz="2200" b="0">
+              <a:rPr sz="2000" b="0" i="0">
                 <a:solidFill>
                   <a:srgbClr val="94A3B8"/>
                 </a:solidFill>
-                <a:latin typeface="맑은 고딕"/>
+                <a:latin typeface="NanumBarunGothic"/>
               </a:rPr>
               <a:t>스마트 냉장고 Freeze 프로젝트</a:t>
             </a:r>
@@ -10295,14 +10388,14 @@
         </p:nvSpPr>
         <p:spPr>
           <a:xfrm>
-            <a:off x="914400" y="3474720"/>
-            <a:ext cx="2651760" cy="548640"/>
+            <a:off x="548640" y="3108960"/>
+            <a:ext cx="2743200" cy="594360"/>
           </a:xfrm>
           <a:prstGeom prst="rect">
             <a:avLst/>
           </a:prstGeom>
           <a:solidFill>
-            <a:srgbClr val="0D2818"/>
+            <a:srgbClr val="0F1F14"/>
           </a:solidFill>
           <a:ln w="12700">
             <a:solidFill>
@@ -10340,8 +10433,8 @@
         </p:nvSpPr>
         <p:spPr>
           <a:xfrm>
-            <a:off x="1005840" y="3547872"/>
-            <a:ext cx="2468880" cy="411480"/>
+            <a:off x="548640" y="3200400"/>
+            <a:ext cx="2743200" cy="411480"/>
           </a:xfrm>
           <a:prstGeom prst="rect">
             <a:avLst/>
@@ -10356,11 +10449,11 @@
           <a:p>
             <a:pPr algn="ctr"/>
             <a:r>
-              <a:rPr sz="1300" b="1">
+              <a:rPr sz="1300" b="1" i="0">
                 <a:solidFill>
                   <a:srgbClr val="22C55E"/>
                 </a:solidFill>
-                <a:latin typeface="맑은 고딕"/>
+                <a:latin typeface="NanumBarunGothic"/>
               </a:rPr>
               <a:t>✅ TinyML 구현 완료</a:t>
             </a:r>
@@ -10375,14 +10468,14 @@
         </p:nvSpPr>
         <p:spPr>
           <a:xfrm>
-            <a:off x="3749039" y="3474720"/>
-            <a:ext cx="2651760" cy="548640"/>
+            <a:off x="3547872" y="3108960"/>
+            <a:ext cx="2743200" cy="594360"/>
           </a:xfrm>
           <a:prstGeom prst="rect">
             <a:avLst/>
           </a:prstGeom>
           <a:solidFill>
-            <a:srgbClr val="0D2818"/>
+            <a:srgbClr val="0F1F14"/>
           </a:solidFill>
           <a:ln w="12700">
             <a:solidFill>
@@ -10420,8 +10513,8 @@
         </p:nvSpPr>
         <p:spPr>
           <a:xfrm>
-            <a:off x="3840479" y="3547872"/>
-            <a:ext cx="2468880" cy="411480"/>
+            <a:off x="3547872" y="3200400"/>
+            <a:ext cx="2743200" cy="411480"/>
           </a:xfrm>
           <a:prstGeom prst="rect">
             <a:avLst/>
@@ -10436,11 +10529,11 @@
           <a:p>
             <a:pPr algn="ctr"/>
             <a:r>
-              <a:rPr sz="1300" b="1">
+              <a:rPr sz="1300" b="1" i="0">
                 <a:solidFill>
                   <a:srgbClr val="22C55E"/>
                 </a:solidFill>
-                <a:latin typeface="맑은 고딕"/>
+                <a:latin typeface="NanumBarunGothic"/>
               </a:rPr>
               <a:t>✅ 실기기 구동 확인</a:t>
             </a:r>
@@ -10455,14 +10548,14 @@
         </p:nvSpPr>
         <p:spPr>
           <a:xfrm>
-            <a:off x="6583680" y="3474720"/>
-            <a:ext cx="2651760" cy="548640"/>
+            <a:off x="6547103" y="3108960"/>
+            <a:ext cx="2743200" cy="594360"/>
           </a:xfrm>
           <a:prstGeom prst="rect">
             <a:avLst/>
           </a:prstGeom>
           <a:solidFill>
-            <a:srgbClr val="0D2818"/>
+            <a:srgbClr val="0F1F14"/>
           </a:solidFill>
           <a:ln w="12700">
             <a:solidFill>
@@ -10500,8 +10593,8 @@
         </p:nvSpPr>
         <p:spPr>
           <a:xfrm>
-            <a:off x="6675120" y="3547872"/>
-            <a:ext cx="2468880" cy="411480"/>
+            <a:off x="6547103" y="3200400"/>
+            <a:ext cx="2743200" cy="411480"/>
           </a:xfrm>
           <a:prstGeom prst="rect">
             <a:avLst/>
@@ -10516,11 +10609,11 @@
           <a:p>
             <a:pPr algn="ctr"/>
             <a:r>
-              <a:rPr sz="1300" b="1">
+              <a:rPr sz="1300" b="1" i="0">
                 <a:solidFill>
                   <a:srgbClr val="22C55E"/>
                 </a:solidFill>
-                <a:latin typeface="맑은 고딕"/>
+                <a:latin typeface="NanumBarunGothic"/>
               </a:rPr>
               <a:t>✅ 36종 식재료 인식</a:t>
             </a:r>
@@ -10535,14 +10628,14 @@
         </p:nvSpPr>
         <p:spPr>
           <a:xfrm>
-            <a:off x="9418320" y="3474720"/>
-            <a:ext cx="2651760" cy="548640"/>
+            <a:off x="9546336" y="3108960"/>
+            <a:ext cx="2743200" cy="594360"/>
           </a:xfrm>
           <a:prstGeom prst="rect">
             <a:avLst/>
           </a:prstGeom>
           <a:solidFill>
-            <a:srgbClr val="0D2818"/>
+            <a:srgbClr val="0F1F14"/>
           </a:solidFill>
           <a:ln w="12700">
             <a:solidFill>
@@ -10580,8 +10673,8 @@
         </p:nvSpPr>
         <p:spPr>
           <a:xfrm>
-            <a:off x="9509760" y="3547872"/>
-            <a:ext cx="2468880" cy="411480"/>
+            <a:off x="9546336" y="3200400"/>
+            <a:ext cx="2743200" cy="411480"/>
           </a:xfrm>
           <a:prstGeom prst="rect">
             <a:avLst/>
@@ -10596,11 +10689,11 @@
           <a:p>
             <a:pPr algn="ctr"/>
             <a:r>
-              <a:rPr sz="1300" b="1">
+              <a:rPr sz="1300" b="1" i="0">
                 <a:solidFill>
                   <a:srgbClr val="22C55E"/>
                 </a:solidFill>
-                <a:latin typeface="맑은 고딕"/>
+                <a:latin typeface="NanumBarunGothic"/>
               </a:rPr>
               <a:t>✅ 전체 플로우 완성</a:t>
             </a:r>
@@ -10615,14 +10708,14 @@
         </p:nvSpPr>
         <p:spPr>
           <a:xfrm>
-            <a:off x="3200400" y="4389120"/>
-            <a:ext cx="5760720" cy="1554480"/>
+            <a:off x="3383280" y="4023360"/>
+            <a:ext cx="5486400" cy="1737360"/>
           </a:xfrm>
           <a:prstGeom prst="rect">
             <a:avLst/>
           </a:prstGeom>
           <a:solidFill>
-            <a:srgbClr val="0D2818"/>
+            <a:srgbClr val="0F1F14"/>
           </a:solidFill>
           <a:ln w="19050">
             <a:solidFill>
@@ -10660,8 +10753,8 @@
         </p:nvSpPr>
         <p:spPr>
           <a:xfrm>
-            <a:off x="3200400" y="4526280"/>
-            <a:ext cx="5760720" cy="548640"/>
+            <a:off x="3383280" y="4187952"/>
+            <a:ext cx="5486400" cy="640080"/>
           </a:xfrm>
           <a:prstGeom prst="rect">
             <a:avLst/>
@@ -10676,11 +10769,11 @@
           <a:p>
             <a:pPr algn="ctr"/>
             <a:r>
-              <a:rPr sz="2800" b="1">
+              <a:rPr sz="3000" b="1" i="0">
                 <a:solidFill>
                   <a:srgbClr val="22C55E"/>
                 </a:solidFill>
-                <a:latin typeface="맑은 고딕"/>
+                <a:latin typeface="NanumBarunGothic"/>
               </a:rPr>
               <a:t>Q &amp; A</a:t>
             </a:r>
@@ -10695,8 +10788,8 @@
         </p:nvSpPr>
         <p:spPr>
           <a:xfrm>
-            <a:off x="3200400" y="5120640"/>
-            <a:ext cx="5760720" cy="457200"/>
+            <a:off x="3383280" y="4800600"/>
+            <a:ext cx="5486400" cy="457200"/>
           </a:xfrm>
           <a:prstGeom prst="rect">
             <a:avLst/>
@@ -10711,11 +10804,11 @@
           <a:p>
             <a:pPr algn="ctr"/>
             <a:r>
-              <a:rPr sz="1500" b="0">
+              <a:rPr sz="1500" b="0" i="0">
                 <a:solidFill>
                   <a:srgbClr val="94A3B8"/>
                 </a:solidFill>
-                <a:latin typeface="맑은 고딕"/>
+                <a:latin typeface="NanumBarunGothic"/>
               </a:rPr>
               <a:t>질문이 있으시면 말씀해 주세요</a:t>
             </a:r>
@@ -10730,27 +10823,27 @@
         </p:nvSpPr>
         <p:spPr>
           <a:xfrm>
-            <a:off x="11430000" y="6492240"/>
-            <a:ext cx="731520" cy="274320"/>
-          </a:xfrm>
-          <a:prstGeom prst="rect">
-            <a:avLst/>
-          </a:prstGeom>
-          <a:noFill/>
-        </p:spPr>
-        <p:txBody>
-          <a:bodyPr wrap="square">
-            <a:spAutoFit/>
-          </a:bodyPr>
-          <a:lstStyle/>
-          <a:p>
-            <a:pPr algn="l"/>
-            <a:r>
-              <a:rPr sz="1100" b="0">
+            <a:off x="11247120" y="6492240"/>
+            <a:ext cx="914400" cy="274320"/>
+          </a:xfrm>
+          <a:prstGeom prst="rect">
+            <a:avLst/>
+          </a:prstGeom>
+          <a:noFill/>
+        </p:spPr>
+        <p:txBody>
+          <a:bodyPr wrap="square">
+            <a:spAutoFit/>
+          </a:bodyPr>
+          <a:lstStyle/>
+          <a:p>
+            <a:pPr algn="r"/>
+            <a:r>
+              <a:rPr sz="1100" b="0" i="0">
                 <a:solidFill>
                   <a:srgbClr val="334155"/>
                 </a:solidFill>
-                <a:latin typeface="맑은 고딕"/>
+                <a:latin typeface="NanumBarunGothic"/>
               </a:rPr>
               <a:t>09 / 09</a:t>
             </a:r>
